--- a/宣道詩/(宣道詩65)救主引導.pptx
+++ b/宣道詩/(宣道詩65)救主引導.pptx
@@ -2,17 +2,24 @@
 <file path=ppt/presentation.xml><?xml version="1.0" encoding="utf-8"?>
 <p:presentation xmlns:a="http://schemas.openxmlformats.org/drawingml/2006/main" xmlns:r="http://schemas.openxmlformats.org/officeDocument/2006/relationships" xmlns:p="http://schemas.openxmlformats.org/presentationml/2006/main" saveSubsetFonts="1">
   <p:sldMasterIdLst>
-    <p:sldMasterId id="2147483660" r:id="rId1"/>
+    <p:sldMasterId id="2147483672" r:id="rId1"/>
   </p:sldMasterIdLst>
   <p:sldIdLst>
-    <p:sldId id="258" r:id="rId2"/>
-    <p:sldId id="257" r:id="rId3"/>
-    <p:sldId id="259" r:id="rId4"/>
-    <p:sldId id="260" r:id="rId5"/>
-    <p:sldId id="261" r:id="rId6"/>
-    <p:sldId id="262" r:id="rId7"/>
+    <p:sldId id="393" r:id="rId2"/>
+    <p:sldId id="412" r:id="rId3"/>
+    <p:sldId id="413" r:id="rId4"/>
+    <p:sldId id="414" r:id="rId5"/>
+    <p:sldId id="415" r:id="rId6"/>
+    <p:sldId id="416" r:id="rId7"/>
+    <p:sldId id="417" r:id="rId8"/>
+    <p:sldId id="418" r:id="rId9"/>
+    <p:sldId id="419" r:id="rId10"/>
+    <p:sldId id="420" r:id="rId11"/>
+    <p:sldId id="421" r:id="rId12"/>
+    <p:sldId id="422" r:id="rId13"/>
+    <p:sldId id="423" r:id="rId14"/>
   </p:sldIdLst>
-  <p:sldSz cx="9144000" cy="6858000" type="screen4x3"/>
+  <p:sldSz cx="12192000" cy="6858000"/>
   <p:notesSz cx="6858000" cy="9144000"/>
   <p:defaultTextStyle>
     <a:defPPr>
@@ -109,6 +116,22 @@
       </a:defRPr>
     </a:lvl9pPr>
   </p:defaultTextStyle>
+  <p:extLst>
+    <p:ext uri="{EFAFB233-063F-42B5-8137-9DF3F51BA10A}">
+      <p15:sldGuideLst xmlns:p15="http://schemas.microsoft.com/office/powerpoint/2012/main">
+        <p15:guide id="1" orient="horz" pos="2160" userDrawn="1">
+          <p15:clr>
+            <a:srgbClr val="A4A3A4"/>
+          </p15:clr>
+        </p15:guide>
+        <p15:guide id="2" pos="3840" userDrawn="1">
+          <p15:clr>
+            <a:srgbClr val="A4A3A4"/>
+          </p15:clr>
+        </p15:guide>
+      </p15:sldGuideLst>
+    </p:ext>
+  </p:extLst>
 </p:presentation>
 </file>
 
@@ -131,7 +154,7 @@
       </p:grpSpPr>
       <p:sp>
         <p:nvSpPr>
-          <p:cNvPr id="2" name="Title 1"/>
+          <p:cNvPr id="2" name="標題 1"/>
           <p:cNvSpPr>
             <a:spLocks noGrp="1"/>
           </p:cNvSpPr>
@@ -141,31 +164,25 @@
         </p:nvSpPr>
         <p:spPr>
           <a:xfrm>
-            <a:off x="685800" y="2130425"/>
-            <a:ext cx="7772400" cy="1470025"/>
+            <a:off x="914400" y="2130429"/>
+            <a:ext cx="10363200" cy="1470025"/>
           </a:xfrm>
         </p:spPr>
         <p:txBody>
-          <a:bodyPr>
-            <a:noAutofit/>
-          </a:bodyPr>
-          <a:lstStyle>
-            <a:lvl1pPr algn="ctr">
-              <a:defRPr sz="5400"/>
-            </a:lvl1pPr>
-          </a:lstStyle>
-          <a:p>
-            <a:r>
-              <a:rPr lang="zh-TW" altLang="en-US" smtClean="0"/>
-              <a:t>按一下以編輯母片標題樣式</a:t>
-            </a:r>
-            <a:endParaRPr lang="en-US"/>
-          </a:p>
-        </p:txBody>
-      </p:sp>
-      <p:sp>
-        <p:nvSpPr>
-          <p:cNvPr id="3" name="Subtitle 2"/>
+          <a:bodyPr/>
+          <a:lstStyle/>
+          <a:p>
+            <a:r>
+              <a:rPr lang="en-US" altLang="zh-TW"/>
+              <a:t>Click to edit Master title style</a:t>
+            </a:r>
+            <a:endParaRPr lang="zh-TW" altLang="en-US"/>
+          </a:p>
+        </p:txBody>
+      </p:sp>
+      <p:sp>
+        <p:nvSpPr>
+          <p:cNvPr id="3" name="副標題 2"/>
           <p:cNvSpPr>
             <a:spLocks noGrp="1"/>
           </p:cNvSpPr>
@@ -175,20 +192,20 @@
         </p:nvSpPr>
         <p:spPr>
           <a:xfrm>
-            <a:off x="1371600" y="3886200"/>
-            <a:ext cx="6400800" cy="1752600"/>
+            <a:off x="1828800" y="3886200"/>
+            <a:ext cx="8534400" cy="1752600"/>
           </a:xfrm>
         </p:spPr>
         <p:txBody>
-          <a:bodyPr>
-            <a:normAutofit/>
-          </a:bodyPr>
+          <a:bodyPr/>
           <a:lstStyle>
             <a:lvl1pPr marL="0" indent="0" algn="ctr">
               <a:buNone/>
-              <a:defRPr sz="2400">
-                <a:solidFill>
-                  <a:schemeClr val="tx1"/>
+              <a:defRPr>
+                <a:solidFill>
+                  <a:schemeClr val="tx1">
+                    <a:tint val="75000"/>
+                  </a:schemeClr>
                 </a:solidFill>
               </a:defRPr>
             </a:lvl1pPr>
@@ -275,16 +292,16 @@
           </a:lstStyle>
           <a:p>
             <a:r>
-              <a:rPr lang="zh-TW" altLang="en-US" smtClean="0"/>
-              <a:t>按一下以編輯母片副標題樣式</a:t>
-            </a:r>
-            <a:endParaRPr lang="en-US"/>
-          </a:p>
-        </p:txBody>
-      </p:sp>
-      <p:sp>
-        <p:nvSpPr>
-          <p:cNvPr id="4" name="Date Placeholder 3"/>
+              <a:rPr lang="en-US" altLang="zh-TW"/>
+              <a:t>Click to edit Master subtitle style</a:t>
+            </a:r>
+            <a:endParaRPr lang="zh-TW" altLang="en-US"/>
+          </a:p>
+        </p:txBody>
+      </p:sp>
+      <p:sp>
+        <p:nvSpPr>
+          <p:cNvPr id="4" name="日期版面配置區 3"/>
           <p:cNvSpPr>
             <a:spLocks noGrp="1"/>
           </p:cNvSpPr>
@@ -300,7 +317,7 @@
             <a:fld id="{109E15FC-DDF2-429B-908E-6885A609743F}" type="datetimeFigureOut">
               <a:rPr lang="zh-TW" altLang="en-US" smtClean="0"/>
               <a:pPr/>
-              <a:t>2015/1/11</a:t>
+              <a:t>2026/5/30</a:t>
             </a:fld>
             <a:endParaRPr lang="zh-TW" altLang="en-US"/>
           </a:p>
@@ -308,7 +325,7 @@
       </p:sp>
       <p:sp>
         <p:nvSpPr>
-          <p:cNvPr id="5" name="Footer Placeholder 4"/>
+          <p:cNvPr id="5" name="頁尾版面配置區 4"/>
           <p:cNvSpPr>
             <a:spLocks noGrp="1"/>
           </p:cNvSpPr>
@@ -327,7 +344,7 @@
       </p:sp>
       <p:sp>
         <p:nvSpPr>
-          <p:cNvPr id="6" name="Slide Number Placeholder 5"/>
+          <p:cNvPr id="6" name="投影片編號版面配置區 5"/>
           <p:cNvSpPr>
             <a:spLocks noGrp="1"/>
           </p:cNvSpPr>
@@ -350,6 +367,11 @@
         </p:txBody>
       </p:sp>
     </p:spTree>
+    <p:extLst>
+      <p:ext uri="{BB962C8B-B14F-4D97-AF65-F5344CB8AC3E}">
+        <p14:creationId xmlns:p14="http://schemas.microsoft.com/office/powerpoint/2010/main" val="3404781994"/>
+      </p:ext>
+    </p:extLst>
   </p:cSld>
   <p:clrMapOvr>
     <a:masterClrMapping/>
@@ -376,7 +398,7 @@
       </p:grpSpPr>
       <p:sp>
         <p:nvSpPr>
-          <p:cNvPr id="2" name="Title 1"/>
+          <p:cNvPr id="2" name="標題 1"/>
           <p:cNvSpPr>
             <a:spLocks noGrp="1"/>
           </p:cNvSpPr>
@@ -390,16 +412,16 @@
           <a:lstStyle/>
           <a:p>
             <a:r>
-              <a:rPr lang="zh-TW" altLang="en-US" smtClean="0"/>
-              <a:t>按一下以編輯母片標題樣式</a:t>
-            </a:r>
-            <a:endParaRPr lang="en-US"/>
-          </a:p>
-        </p:txBody>
-      </p:sp>
-      <p:sp>
-        <p:nvSpPr>
-          <p:cNvPr id="3" name="Vertical Text Placeholder 2"/>
+              <a:rPr lang="en-US" altLang="zh-TW"/>
+              <a:t>Click to edit Master title style</a:t>
+            </a:r>
+            <a:endParaRPr lang="zh-TW" altLang="en-US"/>
+          </a:p>
+        </p:txBody>
+      </p:sp>
+      <p:sp>
+        <p:nvSpPr>
+          <p:cNvPr id="3" name="直排文字版面配置區 2"/>
           <p:cNvSpPr>
             <a:spLocks noGrp="1"/>
           </p:cNvSpPr>
@@ -414,44 +436,44 @@
           <a:p>
             <a:pPr lvl="0"/>
             <a:r>
-              <a:rPr lang="zh-TW" altLang="en-US" smtClean="0"/>
-              <a:t>按一下以編輯母片文字樣式</a:t>
+              <a:rPr lang="en-US" altLang="zh-TW"/>
+              <a:t>Click to edit Master text styles</a:t>
             </a:r>
           </a:p>
           <a:p>
             <a:pPr lvl="1"/>
             <a:r>
-              <a:rPr lang="zh-TW" altLang="en-US" smtClean="0"/>
-              <a:t>第二層</a:t>
+              <a:rPr lang="en-US" altLang="zh-TW"/>
+              <a:t>Second level</a:t>
             </a:r>
           </a:p>
           <a:p>
             <a:pPr lvl="2"/>
             <a:r>
-              <a:rPr lang="zh-TW" altLang="en-US" smtClean="0"/>
-              <a:t>第三層</a:t>
+              <a:rPr lang="en-US" altLang="zh-TW"/>
+              <a:t>Third level</a:t>
             </a:r>
           </a:p>
           <a:p>
             <a:pPr lvl="3"/>
             <a:r>
-              <a:rPr lang="zh-TW" altLang="en-US" smtClean="0"/>
-              <a:t>第四層</a:t>
+              <a:rPr lang="en-US" altLang="zh-TW"/>
+              <a:t>Fourth level</a:t>
             </a:r>
           </a:p>
           <a:p>
             <a:pPr lvl="4"/>
             <a:r>
-              <a:rPr lang="zh-TW" altLang="en-US" smtClean="0"/>
-              <a:t>第五層</a:t>
-            </a:r>
-            <a:endParaRPr lang="en-US"/>
-          </a:p>
-        </p:txBody>
-      </p:sp>
-      <p:sp>
-        <p:nvSpPr>
-          <p:cNvPr id="4" name="Date Placeholder 3"/>
+              <a:rPr lang="en-US" altLang="zh-TW"/>
+              <a:t>Fifth level</a:t>
+            </a:r>
+            <a:endParaRPr lang="zh-TW" altLang="en-US"/>
+          </a:p>
+        </p:txBody>
+      </p:sp>
+      <p:sp>
+        <p:nvSpPr>
+          <p:cNvPr id="4" name="日期版面配置區 3"/>
           <p:cNvSpPr>
             <a:spLocks noGrp="1"/>
           </p:cNvSpPr>
@@ -467,7 +489,7 @@
             <a:fld id="{109E15FC-DDF2-429B-908E-6885A609743F}" type="datetimeFigureOut">
               <a:rPr lang="zh-TW" altLang="en-US" smtClean="0"/>
               <a:pPr/>
-              <a:t>2015/1/11</a:t>
+              <a:t>2026/5/30</a:t>
             </a:fld>
             <a:endParaRPr lang="zh-TW" altLang="en-US"/>
           </a:p>
@@ -475,7 +497,7 @@
       </p:sp>
       <p:sp>
         <p:nvSpPr>
-          <p:cNvPr id="5" name="Footer Placeholder 4"/>
+          <p:cNvPr id="5" name="頁尾版面配置區 4"/>
           <p:cNvSpPr>
             <a:spLocks noGrp="1"/>
           </p:cNvSpPr>
@@ -494,7 +516,7 @@
       </p:sp>
       <p:sp>
         <p:nvSpPr>
-          <p:cNvPr id="6" name="Slide Number Placeholder 5"/>
+          <p:cNvPr id="6" name="投影片編號版面配置區 5"/>
           <p:cNvSpPr>
             <a:spLocks noGrp="1"/>
           </p:cNvSpPr>
@@ -517,6 +539,11 @@
         </p:txBody>
       </p:sp>
     </p:spTree>
+    <p:extLst>
+      <p:ext uri="{BB962C8B-B14F-4D97-AF65-F5344CB8AC3E}">
+        <p14:creationId xmlns:p14="http://schemas.microsoft.com/office/powerpoint/2010/main" val="3601186166"/>
+      </p:ext>
+    </p:extLst>
   </p:cSld>
   <p:clrMapOvr>
     <a:masterClrMapping/>
@@ -543,7 +570,7 @@
       </p:grpSpPr>
       <p:sp>
         <p:nvSpPr>
-          <p:cNvPr id="2" name="Vertical Title 1"/>
+          <p:cNvPr id="2" name="直排標題 1"/>
           <p:cNvSpPr>
             <a:spLocks noGrp="1"/>
           </p:cNvSpPr>
@@ -553,8 +580,8 @@
         </p:nvSpPr>
         <p:spPr>
           <a:xfrm>
-            <a:off x="6629400" y="274638"/>
-            <a:ext cx="2057400" cy="5851525"/>
+            <a:off x="8839200" y="274640"/>
+            <a:ext cx="2743200" cy="5851525"/>
           </a:xfrm>
         </p:spPr>
         <p:txBody>
@@ -562,16 +589,16 @@
           <a:lstStyle/>
           <a:p>
             <a:r>
-              <a:rPr lang="zh-TW" altLang="en-US" smtClean="0"/>
-              <a:t>按一下以編輯母片標題樣式</a:t>
-            </a:r>
-            <a:endParaRPr lang="en-US"/>
-          </a:p>
-        </p:txBody>
-      </p:sp>
-      <p:sp>
-        <p:nvSpPr>
-          <p:cNvPr id="3" name="Vertical Text Placeholder 2"/>
+              <a:rPr lang="en-US" altLang="zh-TW"/>
+              <a:t>Click to edit Master title style</a:t>
+            </a:r>
+            <a:endParaRPr lang="zh-TW" altLang="en-US"/>
+          </a:p>
+        </p:txBody>
+      </p:sp>
+      <p:sp>
+        <p:nvSpPr>
+          <p:cNvPr id="3" name="直排文字版面配置區 2"/>
           <p:cNvSpPr>
             <a:spLocks noGrp="1"/>
           </p:cNvSpPr>
@@ -581,8 +608,8 @@
         </p:nvSpPr>
         <p:spPr>
           <a:xfrm>
-            <a:off x="457200" y="274638"/>
-            <a:ext cx="6019800" cy="5851525"/>
+            <a:off x="609600" y="274640"/>
+            <a:ext cx="8026400" cy="5851525"/>
           </a:xfrm>
         </p:spPr>
         <p:txBody>
@@ -591,44 +618,44 @@
           <a:p>
             <a:pPr lvl="0"/>
             <a:r>
-              <a:rPr lang="zh-TW" altLang="en-US" smtClean="0"/>
-              <a:t>按一下以編輯母片文字樣式</a:t>
+              <a:rPr lang="en-US" altLang="zh-TW"/>
+              <a:t>Click to edit Master text styles</a:t>
             </a:r>
           </a:p>
           <a:p>
             <a:pPr lvl="1"/>
             <a:r>
-              <a:rPr lang="zh-TW" altLang="en-US" smtClean="0"/>
-              <a:t>第二層</a:t>
+              <a:rPr lang="en-US" altLang="zh-TW"/>
+              <a:t>Second level</a:t>
             </a:r>
           </a:p>
           <a:p>
             <a:pPr lvl="2"/>
             <a:r>
-              <a:rPr lang="zh-TW" altLang="en-US" smtClean="0"/>
-              <a:t>第三層</a:t>
+              <a:rPr lang="en-US" altLang="zh-TW"/>
+              <a:t>Third level</a:t>
             </a:r>
           </a:p>
           <a:p>
             <a:pPr lvl="3"/>
             <a:r>
-              <a:rPr lang="zh-TW" altLang="en-US" smtClean="0"/>
-              <a:t>第四層</a:t>
+              <a:rPr lang="en-US" altLang="zh-TW"/>
+              <a:t>Fourth level</a:t>
             </a:r>
           </a:p>
           <a:p>
             <a:pPr lvl="4"/>
             <a:r>
-              <a:rPr lang="zh-TW" altLang="en-US" smtClean="0"/>
-              <a:t>第五層</a:t>
-            </a:r>
-            <a:endParaRPr lang="en-US"/>
-          </a:p>
-        </p:txBody>
-      </p:sp>
-      <p:sp>
-        <p:nvSpPr>
-          <p:cNvPr id="4" name="Date Placeholder 3"/>
+              <a:rPr lang="en-US" altLang="zh-TW"/>
+              <a:t>Fifth level</a:t>
+            </a:r>
+            <a:endParaRPr lang="zh-TW" altLang="en-US"/>
+          </a:p>
+        </p:txBody>
+      </p:sp>
+      <p:sp>
+        <p:nvSpPr>
+          <p:cNvPr id="4" name="日期版面配置區 3"/>
           <p:cNvSpPr>
             <a:spLocks noGrp="1"/>
           </p:cNvSpPr>
@@ -644,7 +671,7 @@
             <a:fld id="{109E15FC-DDF2-429B-908E-6885A609743F}" type="datetimeFigureOut">
               <a:rPr lang="zh-TW" altLang="en-US" smtClean="0"/>
               <a:pPr/>
-              <a:t>2015/1/11</a:t>
+              <a:t>2026/5/30</a:t>
             </a:fld>
             <a:endParaRPr lang="zh-TW" altLang="en-US"/>
           </a:p>
@@ -652,7 +679,7 @@
       </p:sp>
       <p:sp>
         <p:nvSpPr>
-          <p:cNvPr id="5" name="Footer Placeholder 4"/>
+          <p:cNvPr id="5" name="頁尾版面配置區 4"/>
           <p:cNvSpPr>
             <a:spLocks noGrp="1"/>
           </p:cNvSpPr>
@@ -671,7 +698,7 @@
       </p:sp>
       <p:sp>
         <p:nvSpPr>
-          <p:cNvPr id="6" name="Slide Number Placeholder 5"/>
+          <p:cNvPr id="6" name="投影片編號版面配置區 5"/>
           <p:cNvSpPr>
             <a:spLocks noGrp="1"/>
           </p:cNvSpPr>
@@ -694,6 +721,11 @@
         </p:txBody>
       </p:sp>
     </p:spTree>
+    <p:extLst>
+      <p:ext uri="{BB962C8B-B14F-4D97-AF65-F5344CB8AC3E}">
+        <p14:creationId xmlns:p14="http://schemas.microsoft.com/office/powerpoint/2010/main" val="854805272"/>
+      </p:ext>
+    </p:extLst>
   </p:cSld>
   <p:clrMapOvr>
     <a:masterClrMapping/>
@@ -720,7 +752,7 @@
       </p:grpSpPr>
       <p:sp>
         <p:nvSpPr>
-          <p:cNvPr id="2" name="Title 1"/>
+          <p:cNvPr id="2" name="標題 1"/>
           <p:cNvSpPr>
             <a:spLocks noGrp="1"/>
           </p:cNvSpPr>
@@ -734,16 +766,16 @@
           <a:lstStyle/>
           <a:p>
             <a:r>
-              <a:rPr lang="zh-TW" altLang="en-US" smtClean="0"/>
-              <a:t>按一下以編輯母片標題樣式</a:t>
-            </a:r>
-            <a:endParaRPr lang="en-US"/>
-          </a:p>
-        </p:txBody>
-      </p:sp>
-      <p:sp>
-        <p:nvSpPr>
-          <p:cNvPr id="3" name="Content Placeholder 2"/>
+              <a:rPr lang="en-US" altLang="zh-TW"/>
+              <a:t>Click to edit Master title style</a:t>
+            </a:r>
+            <a:endParaRPr lang="zh-TW" altLang="en-US"/>
+          </a:p>
+        </p:txBody>
+      </p:sp>
+      <p:sp>
+        <p:nvSpPr>
+          <p:cNvPr id="3" name="內容版面配置區 2"/>
           <p:cNvSpPr>
             <a:spLocks noGrp="1"/>
           </p:cNvSpPr>
@@ -758,44 +790,44 @@
           <a:p>
             <a:pPr lvl="0"/>
             <a:r>
-              <a:rPr lang="zh-TW" altLang="en-US" smtClean="0"/>
-              <a:t>按一下以編輯母片文字樣式</a:t>
+              <a:rPr lang="en-US" altLang="zh-TW"/>
+              <a:t>Click to edit Master text styles</a:t>
             </a:r>
           </a:p>
           <a:p>
             <a:pPr lvl="1"/>
             <a:r>
-              <a:rPr lang="zh-TW" altLang="en-US" smtClean="0"/>
-              <a:t>第二層</a:t>
+              <a:rPr lang="en-US" altLang="zh-TW"/>
+              <a:t>Second level</a:t>
             </a:r>
           </a:p>
           <a:p>
             <a:pPr lvl="2"/>
             <a:r>
-              <a:rPr lang="zh-TW" altLang="en-US" smtClean="0"/>
-              <a:t>第三層</a:t>
+              <a:rPr lang="en-US" altLang="zh-TW"/>
+              <a:t>Third level</a:t>
             </a:r>
           </a:p>
           <a:p>
             <a:pPr lvl="3"/>
             <a:r>
-              <a:rPr lang="zh-TW" altLang="en-US" smtClean="0"/>
-              <a:t>第四層</a:t>
+              <a:rPr lang="en-US" altLang="zh-TW"/>
+              <a:t>Fourth level</a:t>
             </a:r>
           </a:p>
           <a:p>
             <a:pPr lvl="4"/>
             <a:r>
-              <a:rPr lang="zh-TW" altLang="en-US" smtClean="0"/>
-              <a:t>第五層</a:t>
-            </a:r>
-            <a:endParaRPr lang="en-US"/>
-          </a:p>
-        </p:txBody>
-      </p:sp>
-      <p:sp>
-        <p:nvSpPr>
-          <p:cNvPr id="4" name="Date Placeholder 3"/>
+              <a:rPr lang="en-US" altLang="zh-TW"/>
+              <a:t>Fifth level</a:t>
+            </a:r>
+            <a:endParaRPr lang="zh-TW" altLang="en-US"/>
+          </a:p>
+        </p:txBody>
+      </p:sp>
+      <p:sp>
+        <p:nvSpPr>
+          <p:cNvPr id="4" name="日期版面配置區 3"/>
           <p:cNvSpPr>
             <a:spLocks noGrp="1"/>
           </p:cNvSpPr>
@@ -811,7 +843,7 @@
             <a:fld id="{109E15FC-DDF2-429B-908E-6885A609743F}" type="datetimeFigureOut">
               <a:rPr lang="zh-TW" altLang="en-US" smtClean="0"/>
               <a:pPr/>
-              <a:t>2015/1/11</a:t>
+              <a:t>2026/5/30</a:t>
             </a:fld>
             <a:endParaRPr lang="zh-TW" altLang="en-US"/>
           </a:p>
@@ -819,7 +851,7 @@
       </p:sp>
       <p:sp>
         <p:nvSpPr>
-          <p:cNvPr id="5" name="Footer Placeholder 4"/>
+          <p:cNvPr id="5" name="頁尾版面配置區 4"/>
           <p:cNvSpPr>
             <a:spLocks noGrp="1"/>
           </p:cNvSpPr>
@@ -838,7 +870,7 @@
       </p:sp>
       <p:sp>
         <p:nvSpPr>
-          <p:cNvPr id="6" name="Slide Number Placeholder 5"/>
+          <p:cNvPr id="6" name="投影片編號版面配置區 5"/>
           <p:cNvSpPr>
             <a:spLocks noGrp="1"/>
           </p:cNvSpPr>
@@ -861,6 +893,11 @@
         </p:txBody>
       </p:sp>
     </p:spTree>
+    <p:extLst>
+      <p:ext uri="{BB962C8B-B14F-4D97-AF65-F5344CB8AC3E}">
+        <p14:creationId xmlns:p14="http://schemas.microsoft.com/office/powerpoint/2010/main" val="1710706474"/>
+      </p:ext>
+    </p:extLst>
   </p:cSld>
   <p:clrMapOvr>
     <a:masterClrMapping/>
@@ -887,41 +924,39 @@
       </p:grpSpPr>
       <p:sp>
         <p:nvSpPr>
-          <p:cNvPr id="2" name="Title 1"/>
-          <p:cNvSpPr>
-            <a:spLocks noGrp="1"/>
-          </p:cNvSpPr>
-          <p:nvPr>
-            <p:ph type="title" hasCustomPrompt="1"/>
+          <p:cNvPr id="2" name="標題 1"/>
+          <p:cNvSpPr>
+            <a:spLocks noGrp="1"/>
+          </p:cNvSpPr>
+          <p:nvPr>
+            <p:ph type="title"/>
           </p:nvPr>
         </p:nvSpPr>
         <p:spPr>
           <a:xfrm>
-            <a:off x="722313" y="2871787"/>
-            <a:ext cx="7772400" cy="1362075"/>
+            <a:off x="963084" y="4406902"/>
+            <a:ext cx="10363200" cy="1362075"/>
           </a:xfrm>
         </p:spPr>
         <p:txBody>
-          <a:bodyPr anchor="t">
-            <a:noAutofit/>
-          </a:bodyPr>
+          <a:bodyPr anchor="t"/>
           <a:lstStyle>
             <a:lvl1pPr algn="l">
-              <a:defRPr sz="4400" b="1" cap="none"/>
+              <a:defRPr sz="4000" b="1" cap="all"/>
             </a:lvl1pPr>
           </a:lstStyle>
           <a:p>
             <a:r>
-              <a:rPr lang="en-US" smtClean="0"/>
-              <a:t>Click to edit master title style</a:t>
-            </a:r>
-            <a:endParaRPr lang="en-US"/>
-          </a:p>
-        </p:txBody>
-      </p:sp>
-      <p:sp>
-        <p:nvSpPr>
-          <p:cNvPr id="3" name="Text Placeholder 2"/>
+              <a:rPr lang="en-US" altLang="zh-TW"/>
+              <a:t>Click to edit Master title style</a:t>
+            </a:r>
+            <a:endParaRPr lang="zh-TW" altLang="en-US"/>
+          </a:p>
+        </p:txBody>
+      </p:sp>
+      <p:sp>
+        <p:nvSpPr>
+          <p:cNvPr id="3" name="文字版面配置區 2"/>
           <p:cNvSpPr>
             <a:spLocks noGrp="1"/>
           </p:cNvSpPr>
@@ -931,8 +966,8 @@
         </p:nvSpPr>
         <p:spPr>
           <a:xfrm>
-            <a:off x="722313" y="1371600"/>
-            <a:ext cx="7772400" cy="1500187"/>
+            <a:off x="963084" y="2906713"/>
+            <a:ext cx="10363200" cy="1500187"/>
           </a:xfrm>
         </p:spPr>
         <p:txBody>
@@ -942,7 +977,9 @@
               <a:buNone/>
               <a:defRPr sz="2000">
                 <a:solidFill>
-                  <a:schemeClr val="tx1"/>
+                  <a:schemeClr val="tx1">
+                    <a:tint val="75000"/>
+                  </a:schemeClr>
                 </a:solidFill>
               </a:defRPr>
             </a:lvl1pPr>
@@ -1030,15 +1067,15 @@
           <a:p>
             <a:pPr lvl="0"/>
             <a:r>
-              <a:rPr lang="zh-TW" altLang="en-US" smtClean="0"/>
-              <a:t>按一下以編輯母片文字樣式</a:t>
-            </a:r>
-          </a:p>
-        </p:txBody>
-      </p:sp>
-      <p:sp>
-        <p:nvSpPr>
-          <p:cNvPr id="4" name="Date Placeholder 3"/>
+              <a:rPr lang="en-US" altLang="zh-TW"/>
+              <a:t>Click to edit Master text styles</a:t>
+            </a:r>
+          </a:p>
+        </p:txBody>
+      </p:sp>
+      <p:sp>
+        <p:nvSpPr>
+          <p:cNvPr id="4" name="日期版面配置區 3"/>
           <p:cNvSpPr>
             <a:spLocks noGrp="1"/>
           </p:cNvSpPr>
@@ -1054,7 +1091,7 @@
             <a:fld id="{109E15FC-DDF2-429B-908E-6885A609743F}" type="datetimeFigureOut">
               <a:rPr lang="zh-TW" altLang="en-US" smtClean="0"/>
               <a:pPr/>
-              <a:t>2015/1/11</a:t>
+              <a:t>2026/5/30</a:t>
             </a:fld>
             <a:endParaRPr lang="zh-TW" altLang="en-US"/>
           </a:p>
@@ -1062,7 +1099,7 @@
       </p:sp>
       <p:sp>
         <p:nvSpPr>
-          <p:cNvPr id="5" name="Footer Placeholder 4"/>
+          <p:cNvPr id="5" name="頁尾版面配置區 4"/>
           <p:cNvSpPr>
             <a:spLocks noGrp="1"/>
           </p:cNvSpPr>
@@ -1081,7 +1118,7 @@
       </p:sp>
       <p:sp>
         <p:nvSpPr>
-          <p:cNvPr id="6" name="Slide Number Placeholder 5"/>
+          <p:cNvPr id="6" name="投影片編號版面配置區 5"/>
           <p:cNvSpPr>
             <a:spLocks noGrp="1"/>
           </p:cNvSpPr>
@@ -1104,6 +1141,11 @@
         </p:txBody>
       </p:sp>
     </p:spTree>
+    <p:extLst>
+      <p:ext uri="{BB962C8B-B14F-4D97-AF65-F5344CB8AC3E}">
+        <p14:creationId xmlns:p14="http://schemas.microsoft.com/office/powerpoint/2010/main" val="2315597212"/>
+      </p:ext>
+    </p:extLst>
   </p:cSld>
   <p:clrMapOvr>
     <a:masterClrMapping/>
@@ -1130,7 +1172,7 @@
       </p:grpSpPr>
       <p:sp>
         <p:nvSpPr>
-          <p:cNvPr id="2" name="Title 1"/>
+          <p:cNvPr id="2" name="標題 1"/>
           <p:cNvSpPr>
             <a:spLocks noGrp="1"/>
           </p:cNvSpPr>
@@ -1144,16 +1186,16 @@
           <a:lstStyle/>
           <a:p>
             <a:r>
-              <a:rPr lang="zh-TW" altLang="en-US" smtClean="0"/>
-              <a:t>按一下以編輯母片標題樣式</a:t>
-            </a:r>
-            <a:endParaRPr lang="en-US"/>
-          </a:p>
-        </p:txBody>
-      </p:sp>
-      <p:sp>
-        <p:nvSpPr>
-          <p:cNvPr id="3" name="Content Placeholder 2"/>
+              <a:rPr lang="en-US" altLang="zh-TW"/>
+              <a:t>Click to edit Master title style</a:t>
+            </a:r>
+            <a:endParaRPr lang="zh-TW" altLang="en-US"/>
+          </a:p>
+        </p:txBody>
+      </p:sp>
+      <p:sp>
+        <p:nvSpPr>
+          <p:cNvPr id="3" name="內容版面配置區 2"/>
           <p:cNvSpPr>
             <a:spLocks noGrp="1"/>
           </p:cNvSpPr>
@@ -1163,8 +1205,8 @@
         </p:nvSpPr>
         <p:spPr>
           <a:xfrm>
-            <a:off x="457200" y="1600200"/>
-            <a:ext cx="4038600" cy="4525963"/>
+            <a:off x="609600" y="1600202"/>
+            <a:ext cx="5384800" cy="4525963"/>
           </a:xfrm>
         </p:spPr>
         <p:txBody>
@@ -1201,44 +1243,44 @@
           <a:p>
             <a:pPr lvl="0"/>
             <a:r>
-              <a:rPr lang="zh-TW" altLang="en-US" smtClean="0"/>
-              <a:t>按一下以編輯母片文字樣式</a:t>
+              <a:rPr lang="en-US" altLang="zh-TW"/>
+              <a:t>Click to edit Master text styles</a:t>
             </a:r>
           </a:p>
           <a:p>
             <a:pPr lvl="1"/>
             <a:r>
-              <a:rPr lang="zh-TW" altLang="en-US" smtClean="0"/>
-              <a:t>第二層</a:t>
+              <a:rPr lang="en-US" altLang="zh-TW"/>
+              <a:t>Second level</a:t>
             </a:r>
           </a:p>
           <a:p>
             <a:pPr lvl="2"/>
             <a:r>
-              <a:rPr lang="zh-TW" altLang="en-US" smtClean="0"/>
-              <a:t>第三層</a:t>
+              <a:rPr lang="en-US" altLang="zh-TW"/>
+              <a:t>Third level</a:t>
             </a:r>
           </a:p>
           <a:p>
             <a:pPr lvl="3"/>
             <a:r>
-              <a:rPr lang="zh-TW" altLang="en-US" smtClean="0"/>
-              <a:t>第四層</a:t>
+              <a:rPr lang="en-US" altLang="zh-TW"/>
+              <a:t>Fourth level</a:t>
             </a:r>
           </a:p>
           <a:p>
             <a:pPr lvl="4"/>
             <a:r>
-              <a:rPr lang="zh-TW" altLang="en-US" smtClean="0"/>
-              <a:t>第五層</a:t>
-            </a:r>
-            <a:endParaRPr lang="en-US"/>
-          </a:p>
-        </p:txBody>
-      </p:sp>
-      <p:sp>
-        <p:nvSpPr>
-          <p:cNvPr id="4" name="Content Placeholder 3"/>
+              <a:rPr lang="en-US" altLang="zh-TW"/>
+              <a:t>Fifth level</a:t>
+            </a:r>
+            <a:endParaRPr lang="zh-TW" altLang="en-US"/>
+          </a:p>
+        </p:txBody>
+      </p:sp>
+      <p:sp>
+        <p:nvSpPr>
+          <p:cNvPr id="4" name="內容版面配置區 3"/>
           <p:cNvSpPr>
             <a:spLocks noGrp="1"/>
           </p:cNvSpPr>
@@ -1248,8 +1290,8 @@
         </p:nvSpPr>
         <p:spPr>
           <a:xfrm>
-            <a:off x="4648200" y="1600200"/>
-            <a:ext cx="4038600" cy="4525963"/>
+            <a:off x="6197600" y="1600202"/>
+            <a:ext cx="5384800" cy="4525963"/>
           </a:xfrm>
         </p:spPr>
         <p:txBody>
@@ -1286,44 +1328,44 @@
           <a:p>
             <a:pPr lvl="0"/>
             <a:r>
-              <a:rPr lang="zh-TW" altLang="en-US" smtClean="0"/>
-              <a:t>按一下以編輯母片文字樣式</a:t>
+              <a:rPr lang="en-US" altLang="zh-TW"/>
+              <a:t>Click to edit Master text styles</a:t>
             </a:r>
           </a:p>
           <a:p>
             <a:pPr lvl="1"/>
             <a:r>
-              <a:rPr lang="zh-TW" altLang="en-US" smtClean="0"/>
-              <a:t>第二層</a:t>
+              <a:rPr lang="en-US" altLang="zh-TW"/>
+              <a:t>Second level</a:t>
             </a:r>
           </a:p>
           <a:p>
             <a:pPr lvl="2"/>
             <a:r>
-              <a:rPr lang="zh-TW" altLang="en-US" smtClean="0"/>
-              <a:t>第三層</a:t>
+              <a:rPr lang="en-US" altLang="zh-TW"/>
+              <a:t>Third level</a:t>
             </a:r>
           </a:p>
           <a:p>
             <a:pPr lvl="3"/>
             <a:r>
-              <a:rPr lang="zh-TW" altLang="en-US" smtClean="0"/>
-              <a:t>第四層</a:t>
+              <a:rPr lang="en-US" altLang="zh-TW"/>
+              <a:t>Fourth level</a:t>
             </a:r>
           </a:p>
           <a:p>
             <a:pPr lvl="4"/>
             <a:r>
-              <a:rPr lang="zh-TW" altLang="en-US" smtClean="0"/>
-              <a:t>第五層</a:t>
-            </a:r>
-            <a:endParaRPr lang="en-US"/>
-          </a:p>
-        </p:txBody>
-      </p:sp>
-      <p:sp>
-        <p:nvSpPr>
-          <p:cNvPr id="5" name="Date Placeholder 4"/>
+              <a:rPr lang="en-US" altLang="zh-TW"/>
+              <a:t>Fifth level</a:t>
+            </a:r>
+            <a:endParaRPr lang="zh-TW" altLang="en-US"/>
+          </a:p>
+        </p:txBody>
+      </p:sp>
+      <p:sp>
+        <p:nvSpPr>
+          <p:cNvPr id="5" name="日期版面配置區 4"/>
           <p:cNvSpPr>
             <a:spLocks noGrp="1"/>
           </p:cNvSpPr>
@@ -1339,7 +1381,7 @@
             <a:fld id="{109E15FC-DDF2-429B-908E-6885A609743F}" type="datetimeFigureOut">
               <a:rPr lang="zh-TW" altLang="en-US" smtClean="0"/>
               <a:pPr/>
-              <a:t>2015/1/11</a:t>
+              <a:t>2026/5/30</a:t>
             </a:fld>
             <a:endParaRPr lang="zh-TW" altLang="en-US"/>
           </a:p>
@@ -1347,7 +1389,7 @@
       </p:sp>
       <p:sp>
         <p:nvSpPr>
-          <p:cNvPr id="6" name="Footer Placeholder 5"/>
+          <p:cNvPr id="6" name="頁尾版面配置區 5"/>
           <p:cNvSpPr>
             <a:spLocks noGrp="1"/>
           </p:cNvSpPr>
@@ -1366,7 +1408,7 @@
       </p:sp>
       <p:sp>
         <p:nvSpPr>
-          <p:cNvPr id="7" name="Slide Number Placeholder 6"/>
+          <p:cNvPr id="7" name="投影片編號版面配置區 6"/>
           <p:cNvSpPr>
             <a:spLocks noGrp="1"/>
           </p:cNvSpPr>
@@ -1389,6 +1431,11 @@
         </p:txBody>
       </p:sp>
     </p:spTree>
+    <p:extLst>
+      <p:ext uri="{BB962C8B-B14F-4D97-AF65-F5344CB8AC3E}">
+        <p14:creationId xmlns:p14="http://schemas.microsoft.com/office/powerpoint/2010/main" val="2810873288"/>
+      </p:ext>
+    </p:extLst>
   </p:cSld>
   <p:clrMapOvr>
     <a:masterClrMapping/>
@@ -1415,7 +1462,7 @@
       </p:grpSpPr>
       <p:sp>
         <p:nvSpPr>
-          <p:cNvPr id="2" name="Title 1"/>
+          <p:cNvPr id="2" name="標題 1"/>
           <p:cNvSpPr>
             <a:spLocks noGrp="1"/>
           </p:cNvSpPr>
@@ -1433,31 +1480,31 @@
           </a:lstStyle>
           <a:p>
             <a:r>
-              <a:rPr lang="zh-TW" altLang="en-US" smtClean="0"/>
-              <a:t>按一下以編輯母片標題樣式</a:t>
-            </a:r>
-            <a:endParaRPr lang="en-US"/>
-          </a:p>
-        </p:txBody>
-      </p:sp>
-      <p:sp>
-        <p:nvSpPr>
-          <p:cNvPr id="3" name="Text Placeholder 2"/>
-          <p:cNvSpPr>
-            <a:spLocks noGrp="1"/>
-          </p:cNvSpPr>
-          <p:nvPr>
-            <p:ph type="body" idx="1" hasCustomPrompt="1"/>
+              <a:rPr lang="en-US" altLang="zh-TW"/>
+              <a:t>Click to edit Master title style</a:t>
+            </a:r>
+            <a:endParaRPr lang="zh-TW" altLang="en-US"/>
+          </a:p>
+        </p:txBody>
+      </p:sp>
+      <p:sp>
+        <p:nvSpPr>
+          <p:cNvPr id="3" name="文字版面配置區 2"/>
+          <p:cNvSpPr>
+            <a:spLocks noGrp="1"/>
+          </p:cNvSpPr>
+          <p:nvPr>
+            <p:ph type="body" idx="1"/>
           </p:nvPr>
         </p:nvSpPr>
         <p:spPr>
           <a:xfrm>
-            <a:off x="457200" y="1535113"/>
-            <a:ext cx="4040188" cy="639762"/>
+            <a:off x="609600" y="1535114"/>
+            <a:ext cx="5386917" cy="639763"/>
           </a:xfrm>
         </p:spPr>
         <p:txBody>
-          <a:bodyPr anchor="ctr"/>
+          <a:bodyPr anchor="b"/>
           <a:lstStyle>
             <a:lvl1pPr marL="0" indent="0">
               <a:buNone/>
@@ -1499,15 +1546,15 @@
           <a:p>
             <a:pPr lvl="0"/>
             <a:r>
-              <a:rPr lang="en-US" smtClean="0"/>
-              <a:t>CLICK TO EDIT MASTER TEXT STYLES</a:t>
-            </a:r>
-          </a:p>
-        </p:txBody>
-      </p:sp>
-      <p:sp>
-        <p:nvSpPr>
-          <p:cNvPr id="4" name="Content Placeholder 3"/>
+              <a:rPr lang="en-US" altLang="zh-TW"/>
+              <a:t>Click to edit Master text styles</a:t>
+            </a:r>
+          </a:p>
+        </p:txBody>
+      </p:sp>
+      <p:sp>
+        <p:nvSpPr>
+          <p:cNvPr id="4" name="內容版面配置區 3"/>
           <p:cNvSpPr>
             <a:spLocks noGrp="1"/>
           </p:cNvSpPr>
@@ -1517,8 +1564,8 @@
         </p:nvSpPr>
         <p:spPr>
           <a:xfrm>
-            <a:off x="457200" y="2174875"/>
-            <a:ext cx="4040188" cy="3951288"/>
+            <a:off x="609600" y="2174875"/>
+            <a:ext cx="5386917" cy="3951288"/>
           </a:xfrm>
         </p:spPr>
         <p:txBody>
@@ -1555,59 +1602,59 @@
           <a:p>
             <a:pPr lvl="0"/>
             <a:r>
-              <a:rPr lang="zh-TW" altLang="en-US" smtClean="0"/>
-              <a:t>按一下以編輯母片文字樣式</a:t>
+              <a:rPr lang="en-US" altLang="zh-TW"/>
+              <a:t>Click to edit Master text styles</a:t>
             </a:r>
           </a:p>
           <a:p>
             <a:pPr lvl="1"/>
             <a:r>
-              <a:rPr lang="zh-TW" altLang="en-US" smtClean="0"/>
-              <a:t>第二層</a:t>
+              <a:rPr lang="en-US" altLang="zh-TW"/>
+              <a:t>Second level</a:t>
             </a:r>
           </a:p>
           <a:p>
             <a:pPr lvl="2"/>
             <a:r>
-              <a:rPr lang="zh-TW" altLang="en-US" smtClean="0"/>
-              <a:t>第三層</a:t>
+              <a:rPr lang="en-US" altLang="zh-TW"/>
+              <a:t>Third level</a:t>
             </a:r>
           </a:p>
           <a:p>
             <a:pPr lvl="3"/>
             <a:r>
-              <a:rPr lang="zh-TW" altLang="en-US" smtClean="0"/>
-              <a:t>第四層</a:t>
+              <a:rPr lang="en-US" altLang="zh-TW"/>
+              <a:t>Fourth level</a:t>
             </a:r>
           </a:p>
           <a:p>
             <a:pPr lvl="4"/>
             <a:r>
-              <a:rPr lang="zh-TW" altLang="en-US" smtClean="0"/>
-              <a:t>第五層</a:t>
-            </a:r>
-            <a:endParaRPr lang="en-US"/>
-          </a:p>
-        </p:txBody>
-      </p:sp>
-      <p:sp>
-        <p:nvSpPr>
-          <p:cNvPr id="5" name="Text Placeholder 4"/>
-          <p:cNvSpPr>
-            <a:spLocks noGrp="1"/>
-          </p:cNvSpPr>
-          <p:nvPr>
-            <p:ph type="body" sz="quarter" idx="3" hasCustomPrompt="1"/>
+              <a:rPr lang="en-US" altLang="zh-TW"/>
+              <a:t>Fifth level</a:t>
+            </a:r>
+            <a:endParaRPr lang="zh-TW" altLang="en-US"/>
+          </a:p>
+        </p:txBody>
+      </p:sp>
+      <p:sp>
+        <p:nvSpPr>
+          <p:cNvPr id="5" name="文字版面配置區 4"/>
+          <p:cNvSpPr>
+            <a:spLocks noGrp="1"/>
+          </p:cNvSpPr>
+          <p:nvPr>
+            <p:ph type="body" sz="quarter" idx="3"/>
           </p:nvPr>
         </p:nvSpPr>
         <p:spPr>
           <a:xfrm>
-            <a:off x="4645025" y="1535113"/>
-            <a:ext cx="4041775" cy="639762"/>
+            <a:off x="6193373" y="1535114"/>
+            <a:ext cx="5389033" cy="639763"/>
           </a:xfrm>
         </p:spPr>
         <p:txBody>
-          <a:bodyPr anchor="ctr"/>
+          <a:bodyPr anchor="b"/>
           <a:lstStyle>
             <a:lvl1pPr marL="0" indent="0">
               <a:buNone/>
@@ -1649,15 +1696,15 @@
           <a:p>
             <a:pPr lvl="0"/>
             <a:r>
-              <a:rPr lang="en-US" smtClean="0"/>
-              <a:t>CLICK TO EDIT MASTER TEXT STYLES</a:t>
-            </a:r>
-          </a:p>
-        </p:txBody>
-      </p:sp>
-      <p:sp>
-        <p:nvSpPr>
-          <p:cNvPr id="6" name="Content Placeholder 5"/>
+              <a:rPr lang="en-US" altLang="zh-TW"/>
+              <a:t>Click to edit Master text styles</a:t>
+            </a:r>
+          </a:p>
+        </p:txBody>
+      </p:sp>
+      <p:sp>
+        <p:nvSpPr>
+          <p:cNvPr id="6" name="內容版面配置區 5"/>
           <p:cNvSpPr>
             <a:spLocks noGrp="1"/>
           </p:cNvSpPr>
@@ -1667,8 +1714,8 @@
         </p:nvSpPr>
         <p:spPr>
           <a:xfrm>
-            <a:off x="4645025" y="2174875"/>
-            <a:ext cx="4041775" cy="3951288"/>
+            <a:off x="6193373" y="2174875"/>
+            <a:ext cx="5389033" cy="3951288"/>
           </a:xfrm>
         </p:spPr>
         <p:txBody>
@@ -1705,44 +1752,44 @@
           <a:p>
             <a:pPr lvl="0"/>
             <a:r>
-              <a:rPr lang="zh-TW" altLang="en-US" smtClean="0"/>
-              <a:t>按一下以編輯母片文字樣式</a:t>
+              <a:rPr lang="en-US" altLang="zh-TW"/>
+              <a:t>Click to edit Master text styles</a:t>
             </a:r>
           </a:p>
           <a:p>
             <a:pPr lvl="1"/>
             <a:r>
-              <a:rPr lang="zh-TW" altLang="en-US" smtClean="0"/>
-              <a:t>第二層</a:t>
+              <a:rPr lang="en-US" altLang="zh-TW"/>
+              <a:t>Second level</a:t>
             </a:r>
           </a:p>
           <a:p>
             <a:pPr lvl="2"/>
             <a:r>
-              <a:rPr lang="zh-TW" altLang="en-US" smtClean="0"/>
-              <a:t>第三層</a:t>
+              <a:rPr lang="en-US" altLang="zh-TW"/>
+              <a:t>Third level</a:t>
             </a:r>
           </a:p>
           <a:p>
             <a:pPr lvl="3"/>
             <a:r>
-              <a:rPr lang="zh-TW" altLang="en-US" smtClean="0"/>
-              <a:t>第四層</a:t>
+              <a:rPr lang="en-US" altLang="zh-TW"/>
+              <a:t>Fourth level</a:t>
             </a:r>
           </a:p>
           <a:p>
             <a:pPr lvl="4"/>
             <a:r>
-              <a:rPr lang="zh-TW" altLang="en-US" smtClean="0"/>
-              <a:t>第五層</a:t>
-            </a:r>
-            <a:endParaRPr lang="en-US"/>
-          </a:p>
-        </p:txBody>
-      </p:sp>
-      <p:sp>
-        <p:nvSpPr>
-          <p:cNvPr id="7" name="Date Placeholder 6"/>
+              <a:rPr lang="en-US" altLang="zh-TW"/>
+              <a:t>Fifth level</a:t>
+            </a:r>
+            <a:endParaRPr lang="zh-TW" altLang="en-US"/>
+          </a:p>
+        </p:txBody>
+      </p:sp>
+      <p:sp>
+        <p:nvSpPr>
+          <p:cNvPr id="7" name="日期版面配置區 6"/>
           <p:cNvSpPr>
             <a:spLocks noGrp="1"/>
           </p:cNvSpPr>
@@ -1758,7 +1805,7 @@
             <a:fld id="{109E15FC-DDF2-429B-908E-6885A609743F}" type="datetimeFigureOut">
               <a:rPr lang="zh-TW" altLang="en-US" smtClean="0"/>
               <a:pPr/>
-              <a:t>2015/1/11</a:t>
+              <a:t>2026/5/30</a:t>
             </a:fld>
             <a:endParaRPr lang="zh-TW" altLang="en-US"/>
           </a:p>
@@ -1766,7 +1813,7 @@
       </p:sp>
       <p:sp>
         <p:nvSpPr>
-          <p:cNvPr id="8" name="Footer Placeholder 7"/>
+          <p:cNvPr id="8" name="頁尾版面配置區 7"/>
           <p:cNvSpPr>
             <a:spLocks noGrp="1"/>
           </p:cNvSpPr>
@@ -1785,7 +1832,7 @@
       </p:sp>
       <p:sp>
         <p:nvSpPr>
-          <p:cNvPr id="9" name="Slide Number Placeholder 8"/>
+          <p:cNvPr id="9" name="投影片編號版面配置區 8"/>
           <p:cNvSpPr>
             <a:spLocks noGrp="1"/>
           </p:cNvSpPr>
@@ -1808,6 +1855,11 @@
         </p:txBody>
       </p:sp>
     </p:spTree>
+    <p:extLst>
+      <p:ext uri="{BB962C8B-B14F-4D97-AF65-F5344CB8AC3E}">
+        <p14:creationId xmlns:p14="http://schemas.microsoft.com/office/powerpoint/2010/main" val="1600020191"/>
+      </p:ext>
+    </p:extLst>
   </p:cSld>
   <p:clrMapOvr>
     <a:masterClrMapping/>
@@ -1834,7 +1886,7 @@
       </p:grpSpPr>
       <p:sp>
         <p:nvSpPr>
-          <p:cNvPr id="2" name="Title 1"/>
+          <p:cNvPr id="2" name="標題 1"/>
           <p:cNvSpPr>
             <a:spLocks noGrp="1"/>
           </p:cNvSpPr>
@@ -1848,16 +1900,16 @@
           <a:lstStyle/>
           <a:p>
             <a:r>
-              <a:rPr lang="zh-TW" altLang="en-US" smtClean="0"/>
-              <a:t>按一下以編輯母片標題樣式</a:t>
-            </a:r>
-            <a:endParaRPr lang="en-US"/>
-          </a:p>
-        </p:txBody>
-      </p:sp>
-      <p:sp>
-        <p:nvSpPr>
-          <p:cNvPr id="3" name="Date Placeholder 2"/>
+              <a:rPr lang="en-US" altLang="zh-TW"/>
+              <a:t>Click to edit Master title style</a:t>
+            </a:r>
+            <a:endParaRPr lang="zh-TW" altLang="en-US"/>
+          </a:p>
+        </p:txBody>
+      </p:sp>
+      <p:sp>
+        <p:nvSpPr>
+          <p:cNvPr id="3" name="日期版面配置區 2"/>
           <p:cNvSpPr>
             <a:spLocks noGrp="1"/>
           </p:cNvSpPr>
@@ -1873,7 +1925,7 @@
             <a:fld id="{109E15FC-DDF2-429B-908E-6885A609743F}" type="datetimeFigureOut">
               <a:rPr lang="zh-TW" altLang="en-US" smtClean="0"/>
               <a:pPr/>
-              <a:t>2015/1/11</a:t>
+              <a:t>2026/5/30</a:t>
             </a:fld>
             <a:endParaRPr lang="zh-TW" altLang="en-US"/>
           </a:p>
@@ -1881,7 +1933,7 @@
       </p:sp>
       <p:sp>
         <p:nvSpPr>
-          <p:cNvPr id="4" name="Footer Placeholder 3"/>
+          <p:cNvPr id="4" name="頁尾版面配置區 3"/>
           <p:cNvSpPr>
             <a:spLocks noGrp="1"/>
           </p:cNvSpPr>
@@ -1900,7 +1952,7 @@
       </p:sp>
       <p:sp>
         <p:nvSpPr>
-          <p:cNvPr id="5" name="Slide Number Placeholder 4"/>
+          <p:cNvPr id="5" name="投影片編號版面配置區 4"/>
           <p:cNvSpPr>
             <a:spLocks noGrp="1"/>
           </p:cNvSpPr>
@@ -1923,6 +1975,11 @@
         </p:txBody>
       </p:sp>
     </p:spTree>
+    <p:extLst>
+      <p:ext uri="{BB962C8B-B14F-4D97-AF65-F5344CB8AC3E}">
+        <p14:creationId xmlns:p14="http://schemas.microsoft.com/office/powerpoint/2010/main" val="2659534335"/>
+      </p:ext>
+    </p:extLst>
   </p:cSld>
   <p:clrMapOvr>
     <a:masterClrMapping/>
@@ -1949,7 +2006,7 @@
       </p:grpSpPr>
       <p:sp>
         <p:nvSpPr>
-          <p:cNvPr id="2" name="Date Placeholder 1"/>
+          <p:cNvPr id="2" name="日期版面配置區 1"/>
           <p:cNvSpPr>
             <a:spLocks noGrp="1"/>
           </p:cNvSpPr>
@@ -1965,7 +2022,7 @@
             <a:fld id="{109E15FC-DDF2-429B-908E-6885A609743F}" type="datetimeFigureOut">
               <a:rPr lang="zh-TW" altLang="en-US" smtClean="0"/>
               <a:pPr/>
-              <a:t>2015/1/11</a:t>
+              <a:t>2026/5/30</a:t>
             </a:fld>
             <a:endParaRPr lang="zh-TW" altLang="en-US"/>
           </a:p>
@@ -1973,7 +2030,7 @@
       </p:sp>
       <p:sp>
         <p:nvSpPr>
-          <p:cNvPr id="3" name="Footer Placeholder 2"/>
+          <p:cNvPr id="3" name="頁尾版面配置區 2"/>
           <p:cNvSpPr>
             <a:spLocks noGrp="1"/>
           </p:cNvSpPr>
@@ -1992,7 +2049,7 @@
       </p:sp>
       <p:sp>
         <p:nvSpPr>
-          <p:cNvPr id="4" name="Slide Number Placeholder 3"/>
+          <p:cNvPr id="4" name="投影片編號版面配置區 3"/>
           <p:cNvSpPr>
             <a:spLocks noGrp="1"/>
           </p:cNvSpPr>
@@ -2015,6 +2072,11 @@
         </p:txBody>
       </p:sp>
     </p:spTree>
+    <p:extLst>
+      <p:ext uri="{BB962C8B-B14F-4D97-AF65-F5344CB8AC3E}">
+        <p14:creationId xmlns:p14="http://schemas.microsoft.com/office/powerpoint/2010/main" val="3287342311"/>
+      </p:ext>
+    </p:extLst>
   </p:cSld>
   <p:clrMapOvr>
     <a:masterClrMapping/>
@@ -2041,57 +2103,39 @@
       </p:grpSpPr>
       <p:sp>
         <p:nvSpPr>
-          <p:cNvPr id="2" name="Title 1"/>
-          <p:cNvSpPr>
-            <a:spLocks noGrp="1"/>
-          </p:cNvSpPr>
-          <p:nvPr>
-            <p:ph type="title" hasCustomPrompt="1"/>
+          <p:cNvPr id="2" name="標題 1"/>
+          <p:cNvSpPr>
+            <a:spLocks noGrp="1"/>
+          </p:cNvSpPr>
+          <p:nvPr>
+            <p:ph type="title"/>
           </p:nvPr>
         </p:nvSpPr>
         <p:spPr>
           <a:xfrm>
-            <a:off x="457200" y="273050"/>
-            <a:ext cx="3008313" cy="1162050"/>
+            <a:off x="609605" y="273050"/>
+            <a:ext cx="4011084" cy="1162051"/>
           </a:xfrm>
         </p:spPr>
         <p:txBody>
-          <a:bodyPr anchor="b">
-            <a:scene3d>
-              <a:camera prst="orthographicFront"/>
-              <a:lightRig rig="soft" dir="t"/>
-            </a:scene3d>
-            <a:sp3d prstMaterial="powder">
-              <a:contourClr>
-                <a:schemeClr val="bg2"/>
-              </a:contourClr>
-            </a:sp3d>
-          </a:bodyPr>
+          <a:bodyPr anchor="b"/>
           <a:lstStyle>
             <a:lvl1pPr algn="l">
-              <a:defRPr sz="2000" b="1" cap="none" spc="0">
-                <a:ln>
-                  <a:noFill/>
-                </a:ln>
-                <a:solidFill>
-                  <a:schemeClr val="tx2"/>
-                </a:solidFill>
-                <a:effectLst/>
-              </a:defRPr>
+              <a:defRPr sz="2000" b="1"/>
             </a:lvl1pPr>
           </a:lstStyle>
           <a:p>
             <a:r>
-              <a:rPr lang="en-US" smtClean="0"/>
-              <a:t>CLICK TO EDIT MASTER TITLE STYLE</a:t>
-            </a:r>
-            <a:endParaRPr lang="en-US"/>
-          </a:p>
-        </p:txBody>
-      </p:sp>
-      <p:sp>
-        <p:nvSpPr>
-          <p:cNvPr id="3" name="Content Placeholder 2"/>
+              <a:rPr lang="en-US" altLang="zh-TW"/>
+              <a:t>Click to edit Master title style</a:t>
+            </a:r>
+            <a:endParaRPr lang="zh-TW" altLang="en-US"/>
+          </a:p>
+        </p:txBody>
+      </p:sp>
+      <p:sp>
+        <p:nvSpPr>
+          <p:cNvPr id="3" name="內容版面配置區 2"/>
           <p:cNvSpPr>
             <a:spLocks noGrp="1"/>
           </p:cNvSpPr>
@@ -2101,8 +2145,8 @@
         </p:nvSpPr>
         <p:spPr>
           <a:xfrm>
-            <a:off x="3575050" y="273050"/>
-            <a:ext cx="5111750" cy="5853113"/>
+            <a:off x="4766733" y="273054"/>
+            <a:ext cx="6815667" cy="5853113"/>
           </a:xfrm>
         </p:spPr>
         <p:txBody>
@@ -2139,44 +2183,44 @@
           <a:p>
             <a:pPr lvl="0"/>
             <a:r>
-              <a:rPr lang="zh-TW" altLang="en-US" smtClean="0"/>
-              <a:t>按一下以編輯母片文字樣式</a:t>
+              <a:rPr lang="en-US" altLang="zh-TW"/>
+              <a:t>Click to edit Master text styles</a:t>
             </a:r>
           </a:p>
           <a:p>
             <a:pPr lvl="1"/>
             <a:r>
-              <a:rPr lang="zh-TW" altLang="en-US" smtClean="0"/>
-              <a:t>第二層</a:t>
+              <a:rPr lang="en-US" altLang="zh-TW"/>
+              <a:t>Second level</a:t>
             </a:r>
           </a:p>
           <a:p>
             <a:pPr lvl="2"/>
             <a:r>
-              <a:rPr lang="zh-TW" altLang="en-US" smtClean="0"/>
-              <a:t>第三層</a:t>
+              <a:rPr lang="en-US" altLang="zh-TW"/>
+              <a:t>Third level</a:t>
             </a:r>
           </a:p>
           <a:p>
             <a:pPr lvl="3"/>
             <a:r>
-              <a:rPr lang="zh-TW" altLang="en-US" smtClean="0"/>
-              <a:t>第四層</a:t>
+              <a:rPr lang="en-US" altLang="zh-TW"/>
+              <a:t>Fourth level</a:t>
             </a:r>
           </a:p>
           <a:p>
             <a:pPr lvl="4"/>
             <a:r>
-              <a:rPr lang="zh-TW" altLang="en-US" smtClean="0"/>
-              <a:t>第五層</a:t>
-            </a:r>
-            <a:endParaRPr lang="en-US"/>
-          </a:p>
-        </p:txBody>
-      </p:sp>
-      <p:sp>
-        <p:nvSpPr>
-          <p:cNvPr id="4" name="Text Placeholder 3"/>
+              <a:rPr lang="en-US" altLang="zh-TW"/>
+              <a:t>Fifth level</a:t>
+            </a:r>
+            <a:endParaRPr lang="zh-TW" altLang="en-US"/>
+          </a:p>
+        </p:txBody>
+      </p:sp>
+      <p:sp>
+        <p:nvSpPr>
+          <p:cNvPr id="4" name="文字版面配置區 3"/>
           <p:cNvSpPr>
             <a:spLocks noGrp="1"/>
           </p:cNvSpPr>
@@ -2186,8 +2230,8 @@
         </p:nvSpPr>
         <p:spPr>
           <a:xfrm>
-            <a:off x="457200" y="1435100"/>
-            <a:ext cx="3008313" cy="4691063"/>
+            <a:off x="609605" y="1435103"/>
+            <a:ext cx="4011084" cy="4691063"/>
           </a:xfrm>
         </p:spPr>
         <p:txBody>
@@ -2233,15 +2277,15 @@
           <a:p>
             <a:pPr lvl="0"/>
             <a:r>
-              <a:rPr lang="zh-TW" altLang="en-US" smtClean="0"/>
-              <a:t>按一下以編輯母片文字樣式</a:t>
-            </a:r>
-          </a:p>
-        </p:txBody>
-      </p:sp>
-      <p:sp>
-        <p:nvSpPr>
-          <p:cNvPr id="5" name="Date Placeholder 4"/>
+              <a:rPr lang="en-US" altLang="zh-TW"/>
+              <a:t>Click to edit Master text styles</a:t>
+            </a:r>
+          </a:p>
+        </p:txBody>
+      </p:sp>
+      <p:sp>
+        <p:nvSpPr>
+          <p:cNvPr id="5" name="日期版面配置區 4"/>
           <p:cNvSpPr>
             <a:spLocks noGrp="1"/>
           </p:cNvSpPr>
@@ -2257,7 +2301,7 @@
             <a:fld id="{109E15FC-DDF2-429B-908E-6885A609743F}" type="datetimeFigureOut">
               <a:rPr lang="zh-TW" altLang="en-US" smtClean="0"/>
               <a:pPr/>
-              <a:t>2015/1/11</a:t>
+              <a:t>2026/5/30</a:t>
             </a:fld>
             <a:endParaRPr lang="zh-TW" altLang="en-US"/>
           </a:p>
@@ -2265,7 +2309,7 @@
       </p:sp>
       <p:sp>
         <p:nvSpPr>
-          <p:cNvPr id="6" name="Footer Placeholder 5"/>
+          <p:cNvPr id="6" name="頁尾版面配置區 5"/>
           <p:cNvSpPr>
             <a:spLocks noGrp="1"/>
           </p:cNvSpPr>
@@ -2284,7 +2328,7 @@
       </p:sp>
       <p:sp>
         <p:nvSpPr>
-          <p:cNvPr id="7" name="Slide Number Placeholder 6"/>
+          <p:cNvPr id="7" name="投影片編號版面配置區 6"/>
           <p:cNvSpPr>
             <a:spLocks noGrp="1"/>
           </p:cNvSpPr>
@@ -2307,6 +2351,11 @@
         </p:txBody>
       </p:sp>
     </p:spTree>
+    <p:extLst>
+      <p:ext uri="{BB962C8B-B14F-4D97-AF65-F5344CB8AC3E}">
+        <p14:creationId xmlns:p14="http://schemas.microsoft.com/office/powerpoint/2010/main" val="2037646624"/>
+      </p:ext>
+    </p:extLst>
   </p:cSld>
   <p:clrMapOvr>
     <a:masterClrMapping/>
@@ -2333,68 +2382,50 @@
       </p:grpSpPr>
       <p:sp>
         <p:nvSpPr>
-          <p:cNvPr id="2" name="Title 1"/>
-          <p:cNvSpPr>
-            <a:spLocks noGrp="1"/>
-          </p:cNvSpPr>
-          <p:nvPr>
-            <p:ph type="title" hasCustomPrompt="1"/>
+          <p:cNvPr id="2" name="標題 1"/>
+          <p:cNvSpPr>
+            <a:spLocks noGrp="1"/>
+          </p:cNvSpPr>
+          <p:nvPr>
+            <p:ph type="title"/>
           </p:nvPr>
         </p:nvSpPr>
         <p:spPr>
           <a:xfrm>
-            <a:off x="381000" y="1447800"/>
-            <a:ext cx="2971800" cy="1328738"/>
+            <a:off x="2389717" y="4800602"/>
+            <a:ext cx="7315200" cy="566739"/>
           </a:xfrm>
         </p:spPr>
         <p:txBody>
-          <a:bodyPr anchor="b">
-            <a:scene3d>
-              <a:camera prst="orthographicFront"/>
-              <a:lightRig rig="soft" dir="t"/>
-            </a:scene3d>
-            <a:sp3d prstMaterial="powder">
-              <a:contourClr>
-                <a:schemeClr val="bg2"/>
-              </a:contourClr>
-            </a:sp3d>
-          </a:bodyPr>
+          <a:bodyPr anchor="b"/>
           <a:lstStyle>
             <a:lvl1pPr algn="l">
-              <a:defRPr sz="2000" b="1" cap="none" spc="0">
-                <a:ln>
-                  <a:noFill/>
-                </a:ln>
-                <a:solidFill>
-                  <a:schemeClr val="tx2"/>
-                </a:solidFill>
-                <a:effectLst/>
-              </a:defRPr>
+              <a:defRPr sz="2000" b="1"/>
             </a:lvl1pPr>
           </a:lstStyle>
           <a:p>
             <a:r>
-              <a:rPr lang="en-US" smtClean="0"/>
-              <a:t>CLICK TO EDIT MASTER TITLE STYLE</a:t>
-            </a:r>
-            <a:endParaRPr lang="en-US"/>
-          </a:p>
-        </p:txBody>
-      </p:sp>
-      <p:sp>
-        <p:nvSpPr>
-          <p:cNvPr id="4" name="Text Placeholder 3"/>
-          <p:cNvSpPr>
-            <a:spLocks noGrp="1"/>
-          </p:cNvSpPr>
-          <p:nvPr>
-            <p:ph type="body" sz="half" idx="2"/>
+              <a:rPr lang="en-US" altLang="zh-TW"/>
+              <a:t>Click to edit Master title style</a:t>
+            </a:r>
+            <a:endParaRPr lang="zh-TW" altLang="en-US"/>
+          </a:p>
+        </p:txBody>
+      </p:sp>
+      <p:sp>
+        <p:nvSpPr>
+          <p:cNvPr id="3" name="圖片版面配置區 2"/>
+          <p:cNvSpPr>
+            <a:spLocks noGrp="1"/>
+          </p:cNvSpPr>
+          <p:nvPr>
+            <p:ph type="pic" idx="1"/>
           </p:nvPr>
         </p:nvSpPr>
         <p:spPr>
           <a:xfrm>
-            <a:off x="381000" y="2776538"/>
-            <a:ext cx="2971800" cy="804862"/>
+            <a:off x="2389717" y="612775"/>
+            <a:ext cx="7315200" cy="4114800"/>
           </a:xfrm>
         </p:spPr>
         <p:txBody>
@@ -2402,6 +2433,71 @@
           <a:lstStyle>
             <a:lvl1pPr marL="0" indent="0">
               <a:buNone/>
+              <a:defRPr sz="3200"/>
+            </a:lvl1pPr>
+            <a:lvl2pPr marL="457200" indent="0">
+              <a:buNone/>
+              <a:defRPr sz="2800"/>
+            </a:lvl2pPr>
+            <a:lvl3pPr marL="914400" indent="0">
+              <a:buNone/>
+              <a:defRPr sz="2400"/>
+            </a:lvl3pPr>
+            <a:lvl4pPr marL="1371600" indent="0">
+              <a:buNone/>
+              <a:defRPr sz="2000"/>
+            </a:lvl4pPr>
+            <a:lvl5pPr marL="1828800" indent="0">
+              <a:buNone/>
+              <a:defRPr sz="2000"/>
+            </a:lvl5pPr>
+            <a:lvl6pPr marL="2286000" indent="0">
+              <a:buNone/>
+              <a:defRPr sz="2000"/>
+            </a:lvl6pPr>
+            <a:lvl7pPr marL="2743200" indent="0">
+              <a:buNone/>
+              <a:defRPr sz="2000"/>
+            </a:lvl7pPr>
+            <a:lvl8pPr marL="3200400" indent="0">
+              <a:buNone/>
+              <a:defRPr sz="2000"/>
+            </a:lvl8pPr>
+            <a:lvl9pPr marL="3657600" indent="0">
+              <a:buNone/>
+              <a:defRPr sz="2000"/>
+            </a:lvl9pPr>
+          </a:lstStyle>
+          <a:p>
+            <a:r>
+              <a:rPr lang="en-US" altLang="zh-TW"/>
+              <a:t>Click icon to add picture</a:t>
+            </a:r>
+            <a:endParaRPr lang="zh-TW" altLang="en-US"/>
+          </a:p>
+        </p:txBody>
+      </p:sp>
+      <p:sp>
+        <p:nvSpPr>
+          <p:cNvPr id="4" name="文字版面配置區 3"/>
+          <p:cNvSpPr>
+            <a:spLocks noGrp="1"/>
+          </p:cNvSpPr>
+          <p:nvPr>
+            <p:ph type="body" sz="half" idx="2"/>
+          </p:nvPr>
+        </p:nvSpPr>
+        <p:spPr>
+          <a:xfrm>
+            <a:off x="2389717" y="5367340"/>
+            <a:ext cx="7315200" cy="804863"/>
+          </a:xfrm>
+        </p:spPr>
+        <p:txBody>
+          <a:bodyPr/>
+          <a:lstStyle>
+            <a:lvl1pPr marL="0" indent="0">
+              <a:buNone/>
               <a:defRPr sz="1400"/>
             </a:lvl1pPr>
             <a:lvl2pPr marL="457200" indent="0">
@@ -2440,15 +2536,15 @@
           <a:p>
             <a:pPr lvl="0"/>
             <a:r>
-              <a:rPr lang="zh-TW" altLang="en-US" smtClean="0"/>
-              <a:t>按一下以編輯母片文字樣式</a:t>
-            </a:r>
-          </a:p>
-        </p:txBody>
-      </p:sp>
-      <p:sp>
-        <p:nvSpPr>
-          <p:cNvPr id="5" name="Date Placeholder 4"/>
+              <a:rPr lang="en-US" altLang="zh-TW"/>
+              <a:t>Click to edit Master text styles</a:t>
+            </a:r>
+          </a:p>
+        </p:txBody>
+      </p:sp>
+      <p:sp>
+        <p:nvSpPr>
+          <p:cNvPr id="5" name="日期版面配置區 4"/>
           <p:cNvSpPr>
             <a:spLocks noGrp="1"/>
           </p:cNvSpPr>
@@ -2464,7 +2560,7 @@
             <a:fld id="{109E15FC-DDF2-429B-908E-6885A609743F}" type="datetimeFigureOut">
               <a:rPr lang="zh-TW" altLang="en-US" smtClean="0"/>
               <a:pPr/>
-              <a:t>2015/1/11</a:t>
+              <a:t>2026/5/30</a:t>
             </a:fld>
             <a:endParaRPr lang="zh-TW" altLang="en-US"/>
           </a:p>
@@ -2472,7 +2568,7 @@
       </p:sp>
       <p:sp>
         <p:nvSpPr>
-          <p:cNvPr id="6" name="Footer Placeholder 5"/>
+          <p:cNvPr id="6" name="頁尾版面配置區 5"/>
           <p:cNvSpPr>
             <a:spLocks noGrp="1"/>
           </p:cNvSpPr>
@@ -2491,7 +2587,7 @@
       </p:sp>
       <p:sp>
         <p:nvSpPr>
-          <p:cNvPr id="7" name="Slide Number Placeholder 6"/>
+          <p:cNvPr id="7" name="投影片編號版面配置區 6"/>
           <p:cNvSpPr>
             <a:spLocks noGrp="1"/>
           </p:cNvSpPr>
@@ -2513,311 +2609,12 @@
           </a:p>
         </p:txBody>
       </p:sp>
-      <p:sp>
-        <p:nvSpPr>
-          <p:cNvPr id="9" name="Rectangle 8"/>
-          <p:cNvSpPr/>
-          <p:nvPr/>
-        </p:nvSpPr>
-        <p:spPr>
-          <a:xfrm rot="21172883" flipH="1">
-            <a:off x="4068648" y="1312793"/>
-            <a:ext cx="3673971" cy="3673971"/>
-          </a:xfrm>
-          <a:prstGeom prst="rect">
-            <a:avLst/>
-          </a:prstGeom>
-          <a:solidFill>
-            <a:srgbClr val="FFFFFF"/>
-          </a:solidFill>
-          <a:ln w="3175">
-            <a:solidFill>
-              <a:srgbClr val="777777"/>
-            </a:solidFill>
-          </a:ln>
-          <a:effectLst>
-            <a:outerShdw blurRad="63500" dist="6350" dir="5400000" algn="t" rotWithShape="0">
-              <a:prstClr val="black">
-                <a:alpha val="50000"/>
-              </a:prstClr>
-            </a:outerShdw>
-          </a:effectLst>
-        </p:spPr>
-        <p:style>
-          <a:lnRef idx="2">
-            <a:schemeClr val="accent1">
-              <a:shade val="50000"/>
-            </a:schemeClr>
-          </a:lnRef>
-          <a:fillRef idx="1">
-            <a:schemeClr val="accent1"/>
-          </a:fillRef>
-          <a:effectRef idx="0">
-            <a:schemeClr val="accent1"/>
-          </a:effectRef>
-          <a:fontRef idx="minor">
-            <a:schemeClr val="lt1"/>
-          </a:fontRef>
-        </p:style>
-        <p:txBody>
-          <a:bodyPr rtlCol="0" anchor="ctr"/>
-          <a:lstStyle/>
-          <a:p>
-            <a:pPr algn="ctr"/>
-            <a:r>
-              <a:rPr lang="en-US" dirty="0" smtClean="0"/>
-              <a:t>4</a:t>
-            </a:r>
-            <a:endParaRPr lang="en-US" dirty="0"/>
-          </a:p>
-        </p:txBody>
-      </p:sp>
-      <p:sp>
-        <p:nvSpPr>
-          <p:cNvPr id="10" name="Rectangle 9"/>
-          <p:cNvSpPr/>
-          <p:nvPr/>
-        </p:nvSpPr>
-        <p:spPr>
-          <a:xfrm rot="21435926" flipH="1">
-            <a:off x="4045012" y="1267664"/>
-            <a:ext cx="3673971" cy="3673971"/>
-          </a:xfrm>
-          <a:prstGeom prst="rect">
-            <a:avLst/>
-          </a:prstGeom>
-          <a:solidFill>
-            <a:srgbClr val="FFFFFF"/>
-          </a:solidFill>
-          <a:ln w="3175">
-            <a:solidFill>
-              <a:srgbClr val="777777"/>
-            </a:solidFill>
-          </a:ln>
-          <a:effectLst>
-            <a:outerShdw blurRad="63500" dist="6350" dir="5400000" algn="t" rotWithShape="0">
-              <a:prstClr val="black">
-                <a:alpha val="50000"/>
-              </a:prstClr>
-            </a:outerShdw>
-          </a:effectLst>
-        </p:spPr>
-        <p:style>
-          <a:lnRef idx="2">
-            <a:schemeClr val="accent1">
-              <a:shade val="50000"/>
-            </a:schemeClr>
-          </a:lnRef>
-          <a:fillRef idx="1">
-            <a:schemeClr val="accent1"/>
-          </a:fillRef>
-          <a:effectRef idx="0">
-            <a:schemeClr val="accent1"/>
-          </a:effectRef>
-          <a:fontRef idx="minor">
-            <a:schemeClr val="lt1"/>
-          </a:fontRef>
-        </p:style>
-        <p:txBody>
-          <a:bodyPr rtlCol="0" anchor="ctr"/>
-          <a:lstStyle/>
-          <a:p>
-            <a:pPr algn="ctr"/>
-            <a:r>
-              <a:rPr lang="en-US" dirty="0" smtClean="0"/>
-              <a:t>4</a:t>
-            </a:r>
-            <a:endParaRPr lang="en-US" dirty="0"/>
-          </a:p>
-        </p:txBody>
-      </p:sp>
-      <p:sp>
-        <p:nvSpPr>
-          <p:cNvPr id="11" name="Rectangle 10"/>
-          <p:cNvSpPr/>
-          <p:nvPr/>
-        </p:nvSpPr>
-        <p:spPr>
-          <a:xfrm>
-            <a:off x="4065563" y="1252028"/>
-            <a:ext cx="3840480" cy="3840480"/>
-          </a:xfrm>
-          <a:prstGeom prst="rect">
-            <a:avLst/>
-          </a:prstGeom>
-          <a:solidFill>
-            <a:srgbClr val="FFFFFF"/>
-          </a:solidFill>
-          <a:ln w="3175">
-            <a:solidFill>
-              <a:srgbClr val="777777"/>
-            </a:solidFill>
-          </a:ln>
-          <a:effectLst>
-            <a:outerShdw blurRad="76200" dist="6350" dir="5400000" algn="t" rotWithShape="0">
-              <a:prstClr val="black">
-                <a:alpha val="60000"/>
-              </a:prstClr>
-            </a:outerShdw>
-          </a:effectLst>
-        </p:spPr>
-        <p:style>
-          <a:lnRef idx="2">
-            <a:schemeClr val="accent1">
-              <a:shade val="50000"/>
-            </a:schemeClr>
-          </a:lnRef>
-          <a:fillRef idx="1">
-            <a:schemeClr val="accent1"/>
-          </a:fillRef>
-          <a:effectRef idx="0">
-            <a:schemeClr val="accent1"/>
-          </a:effectRef>
-          <a:fontRef idx="minor">
-            <a:schemeClr val="lt1"/>
-          </a:fontRef>
-        </p:style>
-        <p:txBody>
-          <a:bodyPr rtlCol="0" anchor="ctr"/>
-          <a:lstStyle/>
-          <a:p>
-            <a:pPr algn="ctr"/>
-            <a:r>
-              <a:rPr lang="en-US" dirty="0" smtClean="0"/>
-              <a:t>4</a:t>
-            </a:r>
-            <a:endParaRPr lang="en-US" dirty="0"/>
-          </a:p>
-        </p:txBody>
-      </p:sp>
-      <p:sp>
-        <p:nvSpPr>
-          <p:cNvPr id="12" name="Rectangle 11"/>
-          <p:cNvSpPr/>
-          <p:nvPr/>
-        </p:nvSpPr>
-        <p:spPr>
-          <a:xfrm rot="293056">
-            <a:off x="4124179" y="1181685"/>
-            <a:ext cx="3977640" cy="3977640"/>
-          </a:xfrm>
-          <a:prstGeom prst="rect">
-            <a:avLst/>
-          </a:prstGeom>
-          <a:solidFill>
-            <a:srgbClr val="FFFFFF"/>
-          </a:solidFill>
-          <a:ln w="3175">
-            <a:solidFill>
-              <a:srgbClr val="777777"/>
-            </a:solidFill>
-          </a:ln>
-          <a:effectLst>
-            <a:outerShdw blurRad="50000" dist="50800" dir="12900000" sy="99500" kx="90000" ky="150000" algn="tl" rotWithShape="0">
-              <a:srgbClr val="000000">
-                <a:alpha val="37000"/>
-              </a:srgbClr>
-            </a:outerShdw>
-          </a:effectLst>
-        </p:spPr>
-        <p:style>
-          <a:lnRef idx="2">
-            <a:schemeClr val="accent1">
-              <a:shade val="50000"/>
-            </a:schemeClr>
-          </a:lnRef>
-          <a:fillRef idx="1">
-            <a:schemeClr val="accent1"/>
-          </a:fillRef>
-          <a:effectRef idx="0">
-            <a:schemeClr val="accent1"/>
-          </a:effectRef>
-          <a:fontRef idx="minor">
-            <a:schemeClr val="lt1"/>
-          </a:fontRef>
-        </p:style>
-        <p:txBody>
-          <a:bodyPr rtlCol="0" anchor="ctr"/>
-          <a:lstStyle/>
-          <a:p>
-            <a:pPr algn="ctr"/>
-            <a:r>
-              <a:rPr lang="en-US" dirty="0" smtClean="0"/>
-              <a:t>4</a:t>
-            </a:r>
-            <a:endParaRPr lang="en-US" dirty="0"/>
-          </a:p>
-        </p:txBody>
-      </p:sp>
-      <p:sp>
-        <p:nvSpPr>
-          <p:cNvPr id="3" name="Picture Placeholder 2"/>
-          <p:cNvSpPr>
-            <a:spLocks noGrp="1"/>
-          </p:cNvSpPr>
-          <p:nvPr>
-            <p:ph type="pic" idx="1"/>
-          </p:nvPr>
-        </p:nvSpPr>
-        <p:spPr>
-          <a:xfrm rot="300000">
-            <a:off x="4275668" y="1323975"/>
-            <a:ext cx="3657600" cy="3657600"/>
-          </a:xfrm>
-          <a:solidFill>
-            <a:schemeClr val="bg2"/>
-          </a:solidFill>
-        </p:spPr>
-        <p:txBody>
-          <a:bodyPr/>
-          <a:lstStyle>
-            <a:lvl1pPr marL="0" indent="0">
-              <a:buNone/>
-              <a:defRPr sz="3200"/>
-            </a:lvl1pPr>
-            <a:lvl2pPr marL="457200" indent="0">
-              <a:buNone/>
-              <a:defRPr sz="2800"/>
-            </a:lvl2pPr>
-            <a:lvl3pPr marL="914400" indent="0">
-              <a:buNone/>
-              <a:defRPr sz="2400"/>
-            </a:lvl3pPr>
-            <a:lvl4pPr marL="1371600" indent="0">
-              <a:buNone/>
-              <a:defRPr sz="2000"/>
-            </a:lvl4pPr>
-            <a:lvl5pPr marL="1828800" indent="0">
-              <a:buNone/>
-              <a:defRPr sz="2000"/>
-            </a:lvl5pPr>
-            <a:lvl6pPr marL="2286000" indent="0">
-              <a:buNone/>
-              <a:defRPr sz="2000"/>
-            </a:lvl6pPr>
-            <a:lvl7pPr marL="2743200" indent="0">
-              <a:buNone/>
-              <a:defRPr sz="2000"/>
-            </a:lvl7pPr>
-            <a:lvl8pPr marL="3200400" indent="0">
-              <a:buNone/>
-              <a:defRPr sz="2000"/>
-            </a:lvl8pPr>
-            <a:lvl9pPr marL="3657600" indent="0">
-              <a:buNone/>
-              <a:defRPr sz="2000"/>
-            </a:lvl9pPr>
-          </a:lstStyle>
-          <a:p>
-            <a:r>
-              <a:rPr lang="zh-TW" altLang="en-US" smtClean="0"/>
-              <a:t>按一下圖示以新增圖片</a:t>
-            </a:r>
-            <a:endParaRPr lang="en-US"/>
-          </a:p>
-        </p:txBody>
-      </p:sp>
     </p:spTree>
+    <p:extLst>
+      <p:ext uri="{BB962C8B-B14F-4D97-AF65-F5344CB8AC3E}">
+        <p14:creationId xmlns:p14="http://schemas.microsoft.com/office/powerpoint/2010/main" val="2756379982"/>
+      </p:ext>
+    </p:extLst>
   </p:cSld>
   <p:clrMapOvr>
     <a:masterClrMapping/>
@@ -2829,9 +2626,14 @@
 <p:sldMaster xmlns:a="http://schemas.openxmlformats.org/drawingml/2006/main" xmlns:r="http://schemas.openxmlformats.org/officeDocument/2006/relationships" xmlns:p="http://schemas.openxmlformats.org/presentationml/2006/main">
   <p:cSld>
     <p:bg>
-      <p:bgRef idx="1003">
-        <a:schemeClr val="bg2"/>
-      </p:bgRef>
+      <p:bgPr>
+        <a:blipFill dpi="0" rotWithShape="1">
+          <a:blip r:embed="rId13"/>
+          <a:srcRect/>
+          <a:tile tx="0" ty="0" sx="100000" sy="100000" flip="none" algn="tl"/>
+        </a:blipFill>
+        <a:effectLst/>
+      </p:bgPr>
     </p:bg>
     <p:spTree>
       <p:nvGrpSpPr>
@@ -2849,7 +2651,7 @@
       </p:grpSpPr>
       <p:sp>
         <p:nvSpPr>
-          <p:cNvPr id="2" name="Title Placeholder 1"/>
+          <p:cNvPr id="2" name="標題版面配置區 1"/>
           <p:cNvSpPr>
             <a:spLocks noGrp="1"/>
           </p:cNvSpPr>
@@ -2859,8 +2661,8 @@
         </p:nvSpPr>
         <p:spPr>
           <a:xfrm>
-            <a:off x="457200" y="274638"/>
-            <a:ext cx="8229600" cy="1143000"/>
+            <a:off x="609600" y="274637"/>
+            <a:ext cx="10972800" cy="1143000"/>
           </a:xfrm>
           <a:prstGeom prst="rect">
             <a:avLst/>
@@ -2869,30 +2671,19 @@
         <p:txBody>
           <a:bodyPr vert="horz" lIns="91440" tIns="45720" rIns="91440" bIns="45720" rtlCol="0" anchor="ctr">
             <a:normAutofit/>
-            <a:scene3d>
-              <a:camera prst="orthographicFront"/>
-              <a:lightRig rig="soft" dir="t"/>
-            </a:scene3d>
-            <a:sp3d contourW="12700" prstMaterial="powder">
-              <a:bevelT w="29210" h="12700"/>
-              <a:contourClr>
-                <a:schemeClr val="bg2"/>
-              </a:contourClr>
-            </a:sp3d>
           </a:bodyPr>
           <a:lstStyle/>
           <a:p>
             <a:r>
-              <a:rPr lang="zh-TW" altLang="en-US" smtClean="0"/>
+              <a:rPr lang="zh-TW" altLang="en-US"/>
               <a:t>按一下以編輯母片標題樣式</a:t>
             </a:r>
-            <a:endParaRPr lang="en-US"/>
-          </a:p>
-        </p:txBody>
-      </p:sp>
-      <p:sp>
-        <p:nvSpPr>
-          <p:cNvPr id="3" name="Text Placeholder 2"/>
+          </a:p>
+        </p:txBody>
+      </p:sp>
+      <p:sp>
+        <p:nvSpPr>
+          <p:cNvPr id="3" name="文字版面配置區 2"/>
           <p:cNvSpPr>
             <a:spLocks noGrp="1"/>
           </p:cNvSpPr>
@@ -2902,8 +2693,8 @@
         </p:nvSpPr>
         <p:spPr>
           <a:xfrm>
-            <a:off x="457200" y="1600200"/>
-            <a:ext cx="8229600" cy="4525963"/>
+            <a:off x="609600" y="1600202"/>
+            <a:ext cx="10972800" cy="4525963"/>
           </a:xfrm>
           <a:prstGeom prst="rect">
             <a:avLst/>
@@ -2917,44 +2708,43 @@
           <a:p>
             <a:pPr lvl="0"/>
             <a:r>
-              <a:rPr lang="zh-TW" altLang="en-US" smtClean="0"/>
+              <a:rPr lang="zh-TW" altLang="en-US"/>
               <a:t>按一下以編輯母片文字樣式</a:t>
             </a:r>
           </a:p>
           <a:p>
             <a:pPr lvl="1"/>
             <a:r>
-              <a:rPr lang="zh-TW" altLang="en-US" smtClean="0"/>
+              <a:rPr lang="zh-TW" altLang="en-US"/>
               <a:t>第二層</a:t>
             </a:r>
           </a:p>
           <a:p>
             <a:pPr lvl="2"/>
             <a:r>
-              <a:rPr lang="zh-TW" altLang="en-US" smtClean="0"/>
+              <a:rPr lang="zh-TW" altLang="en-US"/>
               <a:t>第三層</a:t>
             </a:r>
           </a:p>
           <a:p>
             <a:pPr lvl="3"/>
             <a:r>
-              <a:rPr lang="zh-TW" altLang="en-US" smtClean="0"/>
+              <a:rPr lang="zh-TW" altLang="en-US"/>
               <a:t>第四層</a:t>
             </a:r>
           </a:p>
           <a:p>
             <a:pPr lvl="4"/>
             <a:r>
-              <a:rPr lang="zh-TW" altLang="en-US" smtClean="0"/>
+              <a:rPr lang="zh-TW" altLang="en-US"/>
               <a:t>第五層</a:t>
             </a:r>
-            <a:endParaRPr lang="en-US"/>
-          </a:p>
-        </p:txBody>
-      </p:sp>
-      <p:sp>
-        <p:nvSpPr>
-          <p:cNvPr id="4" name="Date Placeholder 3"/>
+          </a:p>
+        </p:txBody>
+      </p:sp>
+      <p:sp>
+        <p:nvSpPr>
+          <p:cNvPr id="4" name="日期版面配置區 3"/>
           <p:cNvSpPr>
             <a:spLocks noGrp="1"/>
           </p:cNvSpPr>
@@ -2964,8 +2754,8 @@
         </p:nvSpPr>
         <p:spPr>
           <a:xfrm>
-            <a:off x="457200" y="6356350"/>
-            <a:ext cx="2133600" cy="365125"/>
+            <a:off x="609600" y="6356353"/>
+            <a:ext cx="2844800" cy="365125"/>
           </a:xfrm>
           <a:prstGeom prst="rect">
             <a:avLst/>
@@ -2975,9 +2765,11 @@
           <a:bodyPr vert="horz" lIns="91440" tIns="45720" rIns="91440" bIns="45720" rtlCol="0" anchor="ctr"/>
           <a:lstStyle>
             <a:lvl1pPr algn="l">
-              <a:defRPr sz="1100">
-                <a:solidFill>
-                  <a:schemeClr val="tx1"/>
+              <a:defRPr sz="1200">
+                <a:solidFill>
+                  <a:schemeClr val="tx1">
+                    <a:tint val="75000"/>
+                  </a:schemeClr>
                 </a:solidFill>
               </a:defRPr>
             </a:lvl1pPr>
@@ -2986,7 +2778,7 @@
             <a:fld id="{109E15FC-DDF2-429B-908E-6885A609743F}" type="datetimeFigureOut">
               <a:rPr lang="zh-TW" altLang="en-US" smtClean="0"/>
               <a:pPr/>
-              <a:t>2015/1/11</a:t>
+              <a:t>2026/5/30</a:t>
             </a:fld>
             <a:endParaRPr lang="zh-TW" altLang="en-US"/>
           </a:p>
@@ -2994,7 +2786,7 @@
       </p:sp>
       <p:sp>
         <p:nvSpPr>
-          <p:cNvPr id="5" name="Footer Placeholder 4"/>
+          <p:cNvPr id="5" name="頁尾版面配置區 4"/>
           <p:cNvSpPr>
             <a:spLocks noGrp="1"/>
           </p:cNvSpPr>
@@ -3004,8 +2796,8 @@
         </p:nvSpPr>
         <p:spPr>
           <a:xfrm>
-            <a:off x="3124200" y="6356350"/>
-            <a:ext cx="2895600" cy="365125"/>
+            <a:off x="4165600" y="6356353"/>
+            <a:ext cx="3860800" cy="365125"/>
           </a:xfrm>
           <a:prstGeom prst="rect">
             <a:avLst/>
@@ -3015,9 +2807,11 @@
           <a:bodyPr vert="horz" lIns="91440" tIns="45720" rIns="91440" bIns="45720" rtlCol="0" anchor="ctr"/>
           <a:lstStyle>
             <a:lvl1pPr algn="ctr">
-              <a:defRPr sz="1100">
-                <a:solidFill>
-                  <a:schemeClr val="tx1"/>
+              <a:defRPr sz="1200">
+                <a:solidFill>
+                  <a:schemeClr val="tx1">
+                    <a:tint val="75000"/>
+                  </a:schemeClr>
                 </a:solidFill>
               </a:defRPr>
             </a:lvl1pPr>
@@ -3029,7 +2823,7 @@
       </p:sp>
       <p:sp>
         <p:nvSpPr>
-          <p:cNvPr id="6" name="Slide Number Placeholder 5"/>
+          <p:cNvPr id="6" name="投影片編號版面配置區 5"/>
           <p:cNvSpPr>
             <a:spLocks noGrp="1"/>
           </p:cNvSpPr>
@@ -3039,8 +2833,8 @@
         </p:nvSpPr>
         <p:spPr>
           <a:xfrm>
-            <a:off x="6553200" y="6356350"/>
-            <a:ext cx="2133600" cy="365125"/>
+            <a:off x="8737600" y="6356353"/>
+            <a:ext cx="2844800" cy="365125"/>
           </a:xfrm>
           <a:prstGeom prst="rect">
             <a:avLst/>
@@ -3050,9 +2844,11 @@
           <a:bodyPr vert="horz" lIns="91440" tIns="45720" rIns="91440" bIns="45720" rtlCol="0" anchor="ctr"/>
           <a:lstStyle>
             <a:lvl1pPr algn="r">
-              <a:defRPr sz="1100">
-                <a:solidFill>
-                  <a:schemeClr val="tx1"/>
+              <a:defRPr sz="1200">
+                <a:solidFill>
+                  <a:schemeClr val="tx1">
+                    <a:tint val="75000"/>
+                  </a:schemeClr>
                 </a:solidFill>
               </a:defRPr>
             </a:lvl1pPr>
@@ -3068,115 +2864,51 @@
         </p:txBody>
       </p:sp>
     </p:spTree>
+    <p:extLst>
+      <p:ext uri="{BB962C8B-B14F-4D97-AF65-F5344CB8AC3E}">
+        <p14:creationId xmlns:p14="http://schemas.microsoft.com/office/powerpoint/2010/main" val="3724903153"/>
+      </p:ext>
+    </p:extLst>
   </p:cSld>
   <p:clrMap bg1="lt1" tx1="dk1" bg2="lt2" tx2="dk2" accent1="accent1" accent2="accent2" accent3="accent3" accent4="accent4" accent5="accent5" accent6="accent6" hlink="hlink" folHlink="folHlink"/>
   <p:sldLayoutIdLst>
-    <p:sldLayoutId id="2147483661" r:id="rId1"/>
-    <p:sldLayoutId id="2147483662" r:id="rId2"/>
-    <p:sldLayoutId id="2147483663" r:id="rId3"/>
-    <p:sldLayoutId id="2147483664" r:id="rId4"/>
-    <p:sldLayoutId id="2147483665" r:id="rId5"/>
-    <p:sldLayoutId id="2147483666" r:id="rId6"/>
-    <p:sldLayoutId id="2147483667" r:id="rId7"/>
-    <p:sldLayoutId id="2147483668" r:id="rId8"/>
-    <p:sldLayoutId id="2147483669" r:id="rId9"/>
-    <p:sldLayoutId id="2147483670" r:id="rId10"/>
-    <p:sldLayoutId id="2147483671" r:id="rId11"/>
+    <p:sldLayoutId id="2147483673" r:id="rId1"/>
+    <p:sldLayoutId id="2147483674" r:id="rId2"/>
+    <p:sldLayoutId id="2147483675" r:id="rId3"/>
+    <p:sldLayoutId id="2147483676" r:id="rId4"/>
+    <p:sldLayoutId id="2147483677" r:id="rId5"/>
+    <p:sldLayoutId id="2147483678" r:id="rId6"/>
+    <p:sldLayoutId id="2147483679" r:id="rId7"/>
+    <p:sldLayoutId id="2147483680" r:id="rId8"/>
+    <p:sldLayoutId id="2147483681" r:id="rId9"/>
+    <p:sldLayoutId id="2147483682" r:id="rId10"/>
+    <p:sldLayoutId id="2147483683" r:id="rId11"/>
   </p:sldLayoutIdLst>
   <p:txStyles>
     <p:titleStyle>
-      <a:lvl1pPr algn="l" defTabSz="914400" rtl="0" eaLnBrk="1" latinLnBrk="0" hangingPunct="1">
+      <a:lvl1pPr algn="ctr" defTabSz="914400" rtl="0" eaLnBrk="1" latinLnBrk="0" hangingPunct="1">
         <a:spcBef>
           <a:spcPct val="0"/>
         </a:spcBef>
         <a:buNone/>
-        <a:defRPr sz="4400" b="1" kern="1200">
-          <a:ln>
-            <a:noFill/>
-          </a:ln>
+        <a:defRPr sz="4400" kern="1200">
           <a:solidFill>
-            <a:schemeClr val="tx2"/>
+            <a:schemeClr val="tx1"/>
           </a:solidFill>
-          <a:effectLst>
-            <a:outerShdw blurRad="50800" dist="25400" dir="5400000" algn="t" rotWithShape="0">
-              <a:prstClr val="black">
-                <a:alpha val="80000"/>
-              </a:prstClr>
-            </a:outerShdw>
-          </a:effectLst>
           <a:latin typeface="+mj-lt"/>
           <a:ea typeface="+mj-ea"/>
           <a:cs typeface="+mj-cs"/>
         </a:defRPr>
       </a:lvl1pPr>
-      <a:lvl2pPr eaLnBrk="1" hangingPunct="1">
-        <a:defRPr>
-          <a:solidFill>
-            <a:schemeClr val="tx2"/>
-          </a:solidFill>
-        </a:defRPr>
-      </a:lvl2pPr>
-      <a:lvl3pPr eaLnBrk="1" hangingPunct="1">
-        <a:defRPr>
-          <a:solidFill>
-            <a:schemeClr val="tx2"/>
-          </a:solidFill>
-        </a:defRPr>
-      </a:lvl3pPr>
-      <a:lvl4pPr eaLnBrk="1" hangingPunct="1">
-        <a:defRPr>
-          <a:solidFill>
-            <a:schemeClr val="tx2"/>
-          </a:solidFill>
-        </a:defRPr>
-      </a:lvl4pPr>
-      <a:lvl5pPr eaLnBrk="1" hangingPunct="1">
-        <a:defRPr>
-          <a:solidFill>
-            <a:schemeClr val="tx2"/>
-          </a:solidFill>
-        </a:defRPr>
-      </a:lvl5pPr>
-      <a:lvl6pPr eaLnBrk="1" hangingPunct="1">
-        <a:defRPr>
-          <a:solidFill>
-            <a:schemeClr val="tx2"/>
-          </a:solidFill>
-        </a:defRPr>
-      </a:lvl6pPr>
-      <a:lvl7pPr eaLnBrk="1" hangingPunct="1">
-        <a:defRPr>
-          <a:solidFill>
-            <a:schemeClr val="tx2"/>
-          </a:solidFill>
-        </a:defRPr>
-      </a:lvl7pPr>
-      <a:lvl8pPr eaLnBrk="1" hangingPunct="1">
-        <a:defRPr>
-          <a:solidFill>
-            <a:schemeClr val="tx2"/>
-          </a:solidFill>
-        </a:defRPr>
-      </a:lvl8pPr>
-      <a:lvl9pPr eaLnBrk="1" hangingPunct="1">
-        <a:defRPr>
-          <a:solidFill>
-            <a:schemeClr val="tx2"/>
-          </a:solidFill>
-        </a:defRPr>
-      </a:lvl9pPr>
     </p:titleStyle>
     <p:bodyStyle>
       <a:lvl1pPr marL="342900" indent="-342900" algn="l" defTabSz="914400" rtl="0" eaLnBrk="1" latinLnBrk="0" hangingPunct="1">
         <a:spcBef>
           <a:spcPct val="20000"/>
         </a:spcBef>
-        <a:buClr>
-          <a:schemeClr val="tx2"/>
-        </a:buClr>
-        <a:buFont typeface="Wingdings" pitchFamily="2" charset="2"/>
-        <a:buChar char="§"/>
-        <a:defRPr sz="2800" kern="1200">
+        <a:buFont typeface="Arial" panose="02080604020202020204" pitchFamily="34" charset="0"/>
+        <a:buChar char="•"/>
+        <a:defRPr sz="3200" kern="1200">
           <a:solidFill>
             <a:schemeClr val="tx1"/>
           </a:solidFill>
@@ -3189,12 +2921,9 @@
         <a:spcBef>
           <a:spcPct val="20000"/>
         </a:spcBef>
-        <a:buClr>
-          <a:schemeClr val="tx2"/>
-        </a:buClr>
-        <a:buFont typeface="Wingdings" pitchFamily="2" charset="2"/>
-        <a:buChar char="§"/>
-        <a:defRPr sz="2400" kern="1200">
+        <a:buFont typeface="Arial" panose="02080604020202020204" pitchFamily="34" charset="0"/>
+        <a:buChar char="–"/>
+        <a:defRPr sz="2800" kern="1200">
           <a:solidFill>
             <a:schemeClr val="tx1"/>
           </a:solidFill>
@@ -3207,12 +2936,9 @@
         <a:spcBef>
           <a:spcPct val="20000"/>
         </a:spcBef>
-        <a:buClr>
-          <a:schemeClr val="tx2"/>
-        </a:buClr>
-        <a:buFont typeface="Wingdings" pitchFamily="2" charset="2"/>
-        <a:buChar char="§"/>
-        <a:defRPr sz="2000" kern="1200">
+        <a:buFont typeface="Arial" panose="02080604020202020204" pitchFamily="34" charset="0"/>
+        <a:buChar char="•"/>
+        <a:defRPr sz="2400" kern="1200">
           <a:solidFill>
             <a:schemeClr val="tx1"/>
           </a:solidFill>
@@ -3225,12 +2951,9 @@
         <a:spcBef>
           <a:spcPct val="20000"/>
         </a:spcBef>
-        <a:buClr>
-          <a:schemeClr val="tx2"/>
-        </a:buClr>
-        <a:buFont typeface="Wingdings" pitchFamily="2" charset="2"/>
-        <a:buChar char="§"/>
-        <a:defRPr sz="1800" kern="1200">
+        <a:buFont typeface="Arial" panose="02080604020202020204" pitchFamily="34" charset="0"/>
+        <a:buChar char="–"/>
+        <a:defRPr sz="2000" kern="1200">
           <a:solidFill>
             <a:schemeClr val="tx1"/>
           </a:solidFill>
@@ -3243,12 +2966,9 @@
         <a:spcBef>
           <a:spcPct val="20000"/>
         </a:spcBef>
-        <a:buClr>
-          <a:schemeClr val="tx2"/>
-        </a:buClr>
-        <a:buFont typeface="Wingdings" pitchFamily="2" charset="2"/>
-        <a:buChar char="§"/>
-        <a:defRPr sz="1800" kern="1200">
+        <a:buFont typeface="Arial" panose="02080604020202020204" pitchFamily="34" charset="0"/>
+        <a:buChar char="»"/>
+        <a:defRPr sz="2000" kern="1200">
           <a:solidFill>
             <a:schemeClr val="tx1"/>
           </a:solidFill>
@@ -3261,7 +2981,7 @@
         <a:spcBef>
           <a:spcPct val="20000"/>
         </a:spcBef>
-        <a:buFont typeface="Arial" pitchFamily="34" charset="0"/>
+        <a:buFont typeface="Arial" panose="02080604020202020204" pitchFamily="34" charset="0"/>
         <a:buChar char="•"/>
         <a:defRPr sz="2000" kern="1200">
           <a:solidFill>
@@ -3276,7 +2996,7 @@
         <a:spcBef>
           <a:spcPct val="20000"/>
         </a:spcBef>
-        <a:buFont typeface="Arial" pitchFamily="34" charset="0"/>
+        <a:buFont typeface="Arial" panose="02080604020202020204" pitchFamily="34" charset="0"/>
         <a:buChar char="•"/>
         <a:defRPr sz="2000" kern="1200">
           <a:solidFill>
@@ -3291,7 +3011,7 @@
         <a:spcBef>
           <a:spcPct val="20000"/>
         </a:spcBef>
-        <a:buFont typeface="Arial" pitchFamily="34" charset="0"/>
+        <a:buFont typeface="Arial" panose="02080604020202020204" pitchFamily="34" charset="0"/>
         <a:buChar char="•"/>
         <a:defRPr sz="2000" kern="1200">
           <a:solidFill>
@@ -3306,7 +3026,7 @@
         <a:spcBef>
           <a:spcPct val="20000"/>
         </a:spcBef>
-        <a:buFont typeface="Arial" pitchFamily="34" charset="0"/>
+        <a:buFont typeface="Arial" panose="02080604020202020204" pitchFamily="34" charset="0"/>
         <a:buChar char="•"/>
         <a:defRPr sz="2000" kern="1200">
           <a:solidFill>
@@ -3320,7 +3040,7 @@
     </p:bodyStyle>
     <p:otherStyle>
       <a:defPPr>
-        <a:defRPr lang="en-US"/>
+        <a:defRPr lang="zh-TW"/>
       </a:defPPr>
       <a:lvl1pPr marL="0" algn="l" defTabSz="914400" rtl="0" eaLnBrk="1" latinLnBrk="0" hangingPunct="1">
         <a:defRPr sz="1800" kern="1200">
@@ -3446,24 +3166,131 @@
         </p:nvSpPr>
         <p:spPr>
           <a:xfrm>
-            <a:off x="0" y="0"/>
-            <a:ext cx="8229600" cy="1143000"/>
+            <a:off x="0" y="2660915"/>
+            <a:ext cx="12192000" cy="1143000"/>
           </a:xfrm>
         </p:spPr>
         <p:txBody>
-          <a:bodyPr/>
-          <a:lstStyle/>
-          <a:p>
-            <a:r>
-              <a:rPr lang="zh-TW" altLang="en-US" dirty="0"/>
+          <a:bodyPr>
+            <a:noAutofit/>
+          </a:bodyPr>
+          <a:lstStyle/>
+          <a:p>
+            <a:r>
+              <a:rPr lang="zh-CN" altLang="en-US" sz="5333" b="1" u="sng" dirty="0">
+                <a:solidFill>
+                  <a:srgbClr val="000066"/>
+                </a:solidFill>
+                <a:effectLst>
+                  <a:outerShdw blurRad="38100" dist="38100" dir="2700000" algn="tl">
+                    <a:srgbClr val="000000">
+                      <a:alpha val="43137"/>
+                    </a:srgbClr>
+                  </a:outerShdw>
+                </a:effectLst>
+                <a:latin typeface="微軟正黑體" pitchFamily="34" charset="-120"/>
+                <a:ea typeface="微軟正黑體" pitchFamily="34" charset="-120"/>
+              </a:rPr>
+              <a:t>宣道詩 </a:t>
+            </a:r>
+            <a:r>
+              <a:rPr lang="en-US" altLang="zh-CN" sz="5333" b="1" u="sng" dirty="0">
+                <a:solidFill>
+                  <a:srgbClr val="000066"/>
+                </a:solidFill>
+                <a:effectLst>
+                  <a:outerShdw blurRad="38100" dist="38100" dir="2700000" algn="tl">
+                    <a:srgbClr val="000000">
+                      <a:alpha val="43137"/>
+                    </a:srgbClr>
+                  </a:outerShdw>
+                </a:effectLst>
+                <a:latin typeface="微軟正黑體" pitchFamily="34" charset="-120"/>
+                <a:ea typeface="微軟正黑體" pitchFamily="34" charset="-120"/>
+              </a:rPr>
+              <a:t>65</a:t>
+            </a:r>
+            <a:br>
+              <a:rPr lang="en-US" altLang="zh-CN" sz="7200" b="1" i="1" dirty="0">
+                <a:solidFill>
+                  <a:srgbClr val="660033"/>
+                </a:solidFill>
+                <a:effectLst>
+                  <a:outerShdw blurRad="38100" dist="38100" dir="2700000" algn="tl">
+                    <a:srgbClr val="000000">
+                      <a:alpha val="43137"/>
+                    </a:srgbClr>
+                  </a:outerShdw>
+                </a:effectLst>
+                <a:latin typeface="微軟正黑體" pitchFamily="34" charset="-120"/>
+                <a:ea typeface="微軟正黑體" pitchFamily="34" charset="-120"/>
+              </a:rPr>
+            </a:br>
+            <a:r>
+              <a:rPr lang="zh-TW" altLang="en-US" sz="8000" b="1" dirty="0">
+                <a:solidFill>
+                  <a:srgbClr val="660033"/>
+                </a:solidFill>
+                <a:effectLst>
+                  <a:outerShdw blurRad="38100" dist="38100" dir="2700000" algn="tl">
+                    <a:srgbClr val="000000">
+                      <a:alpha val="43137"/>
+                    </a:srgbClr>
+                  </a:outerShdw>
+                </a:effectLst>
+                <a:latin typeface="微軟正黑體" pitchFamily="34" charset="-120"/>
+                <a:ea typeface="微軟正黑體" pitchFamily="34" charset="-120"/>
+              </a:rPr>
               <a:t>救主引導</a:t>
             </a:r>
           </a:p>
         </p:txBody>
       </p:sp>
-      <p:sp>
-        <p:nvSpPr>
-          <p:cNvPr id="5" name="內容版面配置區 4"/>
+    </p:spTree>
+    <p:extLst>
+      <p:ext uri="{BB962C8B-B14F-4D97-AF65-F5344CB8AC3E}">
+        <p14:creationId xmlns:p14="http://schemas.microsoft.com/office/powerpoint/2010/main" val="3724263107"/>
+      </p:ext>
+    </p:extLst>
+  </p:cSld>
+  <p:clrMapOvr>
+    <a:masterClrMapping/>
+  </p:clrMapOvr>
+</p:sld>
+</file>
+
+<file path=ppt/slides/slide10.xml><?xml version="1.0" encoding="utf-8"?>
+<p:sld xmlns:a="http://schemas.openxmlformats.org/drawingml/2006/main" xmlns:r="http://schemas.openxmlformats.org/officeDocument/2006/relationships" xmlns:p="http://schemas.openxmlformats.org/presentationml/2006/main">
+  <p:cSld>
+    <p:spTree>
+      <p:nvGrpSpPr>
+        <p:cNvPr id="1" name="">
+          <a:extLst>
+            <a:ext uri="{FF2B5EF4-FFF2-40B4-BE49-F238E27FC236}">
+              <a16:creationId xmlns:a16="http://schemas.microsoft.com/office/drawing/2014/main" id="{43BA0C4B-CFDC-A027-D8BB-7C34FE30C250}"/>
+            </a:ext>
+          </a:extLst>
+        </p:cNvPr>
+        <p:cNvGrpSpPr/>
+        <p:nvPr/>
+      </p:nvGrpSpPr>
+      <p:grpSpPr>
+        <a:xfrm>
+          <a:off x="0" y="0"/>
+          <a:ext cx="0" cy="0"/>
+          <a:chOff x="0" y="0"/>
+          <a:chExt cx="0" cy="0"/>
+        </a:xfrm>
+      </p:grpSpPr>
+      <p:sp>
+        <p:nvSpPr>
+          <p:cNvPr id="5" name="內容版面配置區 4">
+            <a:extLst>
+              <a:ext uri="{FF2B5EF4-FFF2-40B4-BE49-F238E27FC236}">
+                <a16:creationId xmlns:a16="http://schemas.microsoft.com/office/drawing/2014/main" id="{E70FBDF2-A895-90F2-36DE-69DDDDF05689}"/>
+              </a:ext>
+            </a:extLst>
+          </p:cNvPr>
           <p:cNvSpPr>
             <a:spLocks noGrp="1"/>
           </p:cNvSpPr>
@@ -3473,55 +3300,534 @@
         </p:nvSpPr>
         <p:spPr>
           <a:xfrm>
-            <a:off x="0" y="928670"/>
-            <a:ext cx="9144000" cy="5929330"/>
+            <a:off x="0" y="2084851"/>
+            <a:ext cx="12192000" cy="2404863"/>
           </a:xfrm>
         </p:spPr>
         <p:txBody>
-          <a:bodyPr>
+          <a:bodyPr anchor="ctr">
             <a:normAutofit/>
           </a:bodyPr>
           <a:lstStyle/>
           <a:p>
-            <a:pPr lvl="0" algn="ctr">
+            <a:pPr marL="0" indent="0" algn="ctr">
               <a:buNone/>
             </a:pPr>
             <a:r>
-              <a:rPr lang="zh-TW" altLang="en-US" sz="5400" dirty="0" smtClean="0"/>
+              <a:rPr lang="zh-TW" altLang="en-US" sz="6400" b="1" dirty="0">
+                <a:solidFill>
+                  <a:srgbClr val="660033"/>
+                </a:solidFill>
+                <a:latin typeface="Microsoft JhengHei" pitchFamily="34" charset="-120"/>
+                <a:ea typeface="Microsoft JhengHei" pitchFamily="34" charset="-120"/>
+              </a:rPr>
               <a:t>救世主凡事引導我</a:t>
             </a:r>
           </a:p>
           <a:p>
-            <a:pPr algn="ctr">
+            <a:pPr marL="0" indent="0" algn="ctr">
               <a:buNone/>
             </a:pPr>
             <a:r>
-              <a:rPr lang="zh-TW" altLang="en-US" sz="5400" dirty="0" smtClean="0"/>
-              <a:t>我何需別有所求</a:t>
-            </a:r>
-          </a:p>
-          <a:p>
-            <a:pPr algn="ctr">
+              <a:rPr lang="zh-TW" altLang="en-US" sz="6400" b="1" dirty="0">
+                <a:solidFill>
+                  <a:srgbClr val="660033"/>
+                </a:solidFill>
+                <a:latin typeface="Microsoft JhengHei" pitchFamily="34" charset="-120"/>
+                <a:ea typeface="Microsoft JhengHei" pitchFamily="34" charset="-120"/>
+              </a:rPr>
+              <a:t>主向我何等慈愛</a:t>
+            </a:r>
+          </a:p>
+        </p:txBody>
+      </p:sp>
+      <p:sp>
+        <p:nvSpPr>
+          <p:cNvPr id="3" name="TextBox 2">
+            <a:extLst>
+              <a:ext uri="{FF2B5EF4-FFF2-40B4-BE49-F238E27FC236}">
+                <a16:creationId xmlns:a16="http://schemas.microsoft.com/office/drawing/2014/main" id="{AA584EFC-5E36-4F1F-4787-E738CEE5D516}"/>
+              </a:ext>
+            </a:extLst>
+          </p:cNvPr>
+          <p:cNvSpPr txBox="1"/>
+          <p:nvPr/>
+        </p:nvSpPr>
+        <p:spPr>
+          <a:xfrm>
+            <a:off x="0" y="5061182"/>
+            <a:ext cx="12192000" cy="707886"/>
+          </a:xfrm>
+          <a:prstGeom prst="rect">
+            <a:avLst/>
+          </a:prstGeom>
+          <a:noFill/>
+        </p:spPr>
+        <p:txBody>
+          <a:bodyPr wrap="square" rtlCol="0">
+            <a:spAutoFit/>
+          </a:bodyPr>
+          <a:lstStyle/>
+          <a:p>
+            <a:pPr algn="ctr"/>
+            <a:r>
+              <a:rPr lang="en-US" sz="4000" b="1" dirty="0">
+                <a:solidFill>
+                  <a:srgbClr val="660033"/>
+                </a:solidFill>
+              </a:rPr>
+              <a:t>( 3 / 3 )</a:t>
+            </a:r>
+            <a:endParaRPr lang="vi-VN" sz="4000" b="1" dirty="0">
+              <a:solidFill>
+                <a:srgbClr val="660033"/>
+              </a:solidFill>
+            </a:endParaRPr>
+          </a:p>
+        </p:txBody>
+      </p:sp>
+    </p:spTree>
+    <p:extLst>
+      <p:ext uri="{BB962C8B-B14F-4D97-AF65-F5344CB8AC3E}">
+        <p14:creationId xmlns:p14="http://schemas.microsoft.com/office/powerpoint/2010/main" val="4082125699"/>
+      </p:ext>
+    </p:extLst>
+  </p:cSld>
+  <p:clrMapOvr>
+    <a:masterClrMapping/>
+  </p:clrMapOvr>
+</p:sld>
+</file>
+
+<file path=ppt/slides/slide11.xml><?xml version="1.0" encoding="utf-8"?>
+<p:sld xmlns:a="http://schemas.openxmlformats.org/drawingml/2006/main" xmlns:r="http://schemas.openxmlformats.org/officeDocument/2006/relationships" xmlns:p="http://schemas.openxmlformats.org/presentationml/2006/main">
+  <p:cSld>
+    <p:spTree>
+      <p:nvGrpSpPr>
+        <p:cNvPr id="1" name="">
+          <a:extLst>
+            <a:ext uri="{FF2B5EF4-FFF2-40B4-BE49-F238E27FC236}">
+              <a16:creationId xmlns:a16="http://schemas.microsoft.com/office/drawing/2014/main" id="{81D56619-49E3-D934-607A-9A6F484A88D4}"/>
+            </a:ext>
+          </a:extLst>
+        </p:cNvPr>
+        <p:cNvGrpSpPr/>
+        <p:nvPr/>
+      </p:nvGrpSpPr>
+      <p:grpSpPr>
+        <a:xfrm>
+          <a:off x="0" y="0"/>
+          <a:ext cx="0" cy="0"/>
+          <a:chOff x="0" y="0"/>
+          <a:chExt cx="0" cy="0"/>
+        </a:xfrm>
+      </p:grpSpPr>
+      <p:sp>
+        <p:nvSpPr>
+          <p:cNvPr id="5" name="內容版面配置區 4">
+            <a:extLst>
+              <a:ext uri="{FF2B5EF4-FFF2-40B4-BE49-F238E27FC236}">
+                <a16:creationId xmlns:a16="http://schemas.microsoft.com/office/drawing/2014/main" id="{F065894B-CABB-884D-30BD-8EEE28340460}"/>
+              </a:ext>
+            </a:extLst>
+          </p:cNvPr>
+          <p:cNvSpPr>
+            <a:spLocks noGrp="1"/>
+          </p:cNvSpPr>
+          <p:nvPr>
+            <p:ph idx="1"/>
+          </p:nvPr>
+        </p:nvSpPr>
+        <p:spPr>
+          <a:xfrm>
+            <a:off x="0" y="2084851"/>
+            <a:ext cx="12192000" cy="2404863"/>
+          </a:xfrm>
+        </p:spPr>
+        <p:txBody>
+          <a:bodyPr anchor="ctr">
+            <a:normAutofit/>
+          </a:bodyPr>
+          <a:lstStyle/>
+          <a:p>
+            <a:pPr marL="0" indent="0" algn="ctr">
               <a:buNone/>
             </a:pPr>
             <a:r>
-              <a:rPr lang="zh-TW" altLang="en-US" sz="5400" dirty="0" smtClean="0"/>
-              <a:t>就主恩我何用心多</a:t>
-            </a:r>
-          </a:p>
-          <a:p>
-            <a:pPr algn="ctr">
+              <a:rPr lang="zh-TW" altLang="en-US" sz="6400" b="1" dirty="0">
+                <a:solidFill>
+                  <a:srgbClr val="660033"/>
+                </a:solidFill>
+                <a:latin typeface="Microsoft JhengHei" pitchFamily="34" charset="-120"/>
+                <a:ea typeface="Microsoft JhengHei" pitchFamily="34" charset="-120"/>
+              </a:rPr>
+              <a:t>所應許俱是安樂多</a:t>
+            </a:r>
+          </a:p>
+          <a:p>
+            <a:pPr marL="0" indent="0" algn="ctr">
               <a:buNone/>
             </a:pPr>
             <a:r>
-              <a:rPr lang="zh-TW" altLang="en-US" sz="5400" dirty="0" smtClean="0"/>
-              <a:t>奇妙恩一生拯救</a:t>
-            </a:r>
-            <a:endParaRPr lang="zh-TW" altLang="en-US" sz="5400" dirty="0"/>
+              <a:rPr lang="zh-TW" altLang="en-US" sz="6400" b="1" dirty="0">
+                <a:solidFill>
+                  <a:srgbClr val="660033"/>
+                </a:solidFill>
+                <a:latin typeface="Microsoft JhengHei" pitchFamily="34" charset="-120"/>
+                <a:ea typeface="Microsoft JhengHei" pitchFamily="34" charset="-120"/>
+              </a:rPr>
+              <a:t>在天堂我父家內</a:t>
+            </a:r>
+          </a:p>
+        </p:txBody>
+      </p:sp>
+      <p:sp>
+        <p:nvSpPr>
+          <p:cNvPr id="3" name="TextBox 2">
+            <a:extLst>
+              <a:ext uri="{FF2B5EF4-FFF2-40B4-BE49-F238E27FC236}">
+                <a16:creationId xmlns:a16="http://schemas.microsoft.com/office/drawing/2014/main" id="{7477AEA0-3DCD-6CAC-B951-0EE7ECD202C3}"/>
+              </a:ext>
+            </a:extLst>
+          </p:cNvPr>
+          <p:cNvSpPr txBox="1"/>
+          <p:nvPr/>
+        </p:nvSpPr>
+        <p:spPr>
+          <a:xfrm>
+            <a:off x="0" y="5061182"/>
+            <a:ext cx="12192000" cy="707886"/>
+          </a:xfrm>
+          <a:prstGeom prst="rect">
+            <a:avLst/>
+          </a:prstGeom>
+          <a:noFill/>
+        </p:spPr>
+        <p:txBody>
+          <a:bodyPr wrap="square" rtlCol="0">
+            <a:spAutoFit/>
+          </a:bodyPr>
+          <a:lstStyle/>
+          <a:p>
+            <a:pPr algn="ctr"/>
+            <a:r>
+              <a:rPr lang="en-US" sz="4000" b="1" dirty="0">
+                <a:solidFill>
+                  <a:srgbClr val="660033"/>
+                </a:solidFill>
+              </a:rPr>
+              <a:t>( 3 / 3 )</a:t>
+            </a:r>
+            <a:endParaRPr lang="vi-VN" sz="4000" b="1" dirty="0">
+              <a:solidFill>
+                <a:srgbClr val="660033"/>
+              </a:solidFill>
+            </a:endParaRPr>
           </a:p>
         </p:txBody>
       </p:sp>
     </p:spTree>
+    <p:extLst>
+      <p:ext uri="{BB962C8B-B14F-4D97-AF65-F5344CB8AC3E}">
+        <p14:creationId xmlns:p14="http://schemas.microsoft.com/office/powerpoint/2010/main" val="531744021"/>
+      </p:ext>
+    </p:extLst>
+  </p:cSld>
+  <p:clrMapOvr>
+    <a:masterClrMapping/>
+  </p:clrMapOvr>
+</p:sld>
+</file>
+
+<file path=ppt/slides/slide12.xml><?xml version="1.0" encoding="utf-8"?>
+<p:sld xmlns:a="http://schemas.openxmlformats.org/drawingml/2006/main" xmlns:r="http://schemas.openxmlformats.org/officeDocument/2006/relationships" xmlns:p="http://schemas.openxmlformats.org/presentationml/2006/main">
+  <p:cSld>
+    <p:spTree>
+      <p:nvGrpSpPr>
+        <p:cNvPr id="1" name="">
+          <a:extLst>
+            <a:ext uri="{FF2B5EF4-FFF2-40B4-BE49-F238E27FC236}">
+              <a16:creationId xmlns:a16="http://schemas.microsoft.com/office/drawing/2014/main" id="{90A65153-6D51-29C3-F3A2-5E0CADEFFF81}"/>
+            </a:ext>
+          </a:extLst>
+        </p:cNvPr>
+        <p:cNvGrpSpPr/>
+        <p:nvPr/>
+      </p:nvGrpSpPr>
+      <p:grpSpPr>
+        <a:xfrm>
+          <a:off x="0" y="0"/>
+          <a:ext cx="0" cy="0"/>
+          <a:chOff x="0" y="0"/>
+          <a:chExt cx="0" cy="0"/>
+        </a:xfrm>
+      </p:grpSpPr>
+      <p:sp>
+        <p:nvSpPr>
+          <p:cNvPr id="5" name="內容版面配置區 4">
+            <a:extLst>
+              <a:ext uri="{FF2B5EF4-FFF2-40B4-BE49-F238E27FC236}">
+                <a16:creationId xmlns:a16="http://schemas.microsoft.com/office/drawing/2014/main" id="{89005C78-0BFC-3E24-069A-B05958BF1F78}"/>
+              </a:ext>
+            </a:extLst>
+          </p:cNvPr>
+          <p:cNvSpPr>
+            <a:spLocks noGrp="1"/>
+          </p:cNvSpPr>
+          <p:nvPr>
+            <p:ph idx="1"/>
+          </p:nvPr>
+        </p:nvSpPr>
+        <p:spPr>
+          <a:xfrm>
+            <a:off x="0" y="2084851"/>
+            <a:ext cx="12192000" cy="2404863"/>
+          </a:xfrm>
+        </p:spPr>
+        <p:txBody>
+          <a:bodyPr anchor="ctr">
+            <a:normAutofit/>
+          </a:bodyPr>
+          <a:lstStyle/>
+          <a:p>
+            <a:pPr marL="0" indent="0" algn="ctr">
+              <a:buNone/>
+            </a:pPr>
+            <a:r>
+              <a:rPr lang="zh-TW" altLang="en-US" sz="6400" b="1" dirty="0">
+                <a:solidFill>
+                  <a:srgbClr val="660033"/>
+                </a:solidFill>
+                <a:latin typeface="Microsoft JhengHei" pitchFamily="34" charset="-120"/>
+                <a:ea typeface="Microsoft JhengHei" pitchFamily="34" charset="-120"/>
+              </a:rPr>
+              <a:t>我靈魂得進永生時</a:t>
+            </a:r>
+          </a:p>
+          <a:p>
+            <a:pPr marL="0" indent="0" algn="ctr">
+              <a:buNone/>
+            </a:pPr>
+            <a:r>
+              <a:rPr lang="zh-TW" altLang="en-US" sz="6400" b="1" dirty="0">
+                <a:solidFill>
+                  <a:srgbClr val="660033"/>
+                </a:solidFill>
+                <a:latin typeface="Microsoft JhengHei" pitchFamily="34" charset="-120"/>
+                <a:ea typeface="Microsoft JhengHei" pitchFamily="34" charset="-120"/>
+              </a:rPr>
+              <a:t>如雙翼飛進神座</a:t>
+            </a:r>
+          </a:p>
+        </p:txBody>
+      </p:sp>
+      <p:sp>
+        <p:nvSpPr>
+          <p:cNvPr id="3" name="TextBox 2">
+            <a:extLst>
+              <a:ext uri="{FF2B5EF4-FFF2-40B4-BE49-F238E27FC236}">
+                <a16:creationId xmlns:a16="http://schemas.microsoft.com/office/drawing/2014/main" id="{843AD7D0-3645-7844-B067-AA81519DC85F}"/>
+              </a:ext>
+            </a:extLst>
+          </p:cNvPr>
+          <p:cNvSpPr txBox="1"/>
+          <p:nvPr/>
+        </p:nvSpPr>
+        <p:spPr>
+          <a:xfrm>
+            <a:off x="0" y="5061182"/>
+            <a:ext cx="12192000" cy="707886"/>
+          </a:xfrm>
+          <a:prstGeom prst="rect">
+            <a:avLst/>
+          </a:prstGeom>
+          <a:noFill/>
+        </p:spPr>
+        <p:txBody>
+          <a:bodyPr wrap="square" rtlCol="0">
+            <a:spAutoFit/>
+          </a:bodyPr>
+          <a:lstStyle/>
+          <a:p>
+            <a:pPr algn="ctr"/>
+            <a:r>
+              <a:rPr lang="en-US" sz="4000" b="1" dirty="0">
+                <a:solidFill>
+                  <a:srgbClr val="660033"/>
+                </a:solidFill>
+              </a:rPr>
+              <a:t>( 3 / 3 )</a:t>
+            </a:r>
+            <a:endParaRPr lang="vi-VN" sz="4000" b="1" dirty="0">
+              <a:solidFill>
+                <a:srgbClr val="660033"/>
+              </a:solidFill>
+            </a:endParaRPr>
+          </a:p>
+        </p:txBody>
+      </p:sp>
+    </p:spTree>
+    <p:extLst>
+      <p:ext uri="{BB962C8B-B14F-4D97-AF65-F5344CB8AC3E}">
+        <p14:creationId xmlns:p14="http://schemas.microsoft.com/office/powerpoint/2010/main" val="3994601925"/>
+      </p:ext>
+    </p:extLst>
+  </p:cSld>
+  <p:clrMapOvr>
+    <a:masterClrMapping/>
+  </p:clrMapOvr>
+</p:sld>
+</file>
+
+<file path=ppt/slides/slide13.xml><?xml version="1.0" encoding="utf-8"?>
+<p:sld xmlns:a="http://schemas.openxmlformats.org/drawingml/2006/main" xmlns:r="http://schemas.openxmlformats.org/officeDocument/2006/relationships" xmlns:p="http://schemas.openxmlformats.org/presentationml/2006/main">
+  <p:cSld>
+    <p:spTree>
+      <p:nvGrpSpPr>
+        <p:cNvPr id="1" name="">
+          <a:extLst>
+            <a:ext uri="{FF2B5EF4-FFF2-40B4-BE49-F238E27FC236}">
+              <a16:creationId xmlns:a16="http://schemas.microsoft.com/office/drawing/2014/main" id="{AA75572D-2E54-A396-E21B-8C41ECDF5C1E}"/>
+            </a:ext>
+          </a:extLst>
+        </p:cNvPr>
+        <p:cNvGrpSpPr/>
+        <p:nvPr/>
+      </p:nvGrpSpPr>
+      <p:grpSpPr>
+        <a:xfrm>
+          <a:off x="0" y="0"/>
+          <a:ext cx="0" cy="0"/>
+          <a:chOff x="0" y="0"/>
+          <a:chExt cx="0" cy="0"/>
+        </a:xfrm>
+      </p:grpSpPr>
+      <p:sp>
+        <p:nvSpPr>
+          <p:cNvPr id="5" name="內容版面配置區 4">
+            <a:extLst>
+              <a:ext uri="{FF2B5EF4-FFF2-40B4-BE49-F238E27FC236}">
+                <a16:creationId xmlns:a16="http://schemas.microsoft.com/office/drawing/2014/main" id="{283FC454-545E-146C-CBDC-3DC122743F32}"/>
+              </a:ext>
+            </a:extLst>
+          </p:cNvPr>
+          <p:cNvSpPr>
+            <a:spLocks noGrp="1"/>
+          </p:cNvSpPr>
+          <p:nvPr>
+            <p:ph idx="1"/>
+          </p:nvPr>
+        </p:nvSpPr>
+        <p:spPr>
+          <a:xfrm>
+            <a:off x="0" y="2084851"/>
+            <a:ext cx="12192000" cy="2404863"/>
+          </a:xfrm>
+        </p:spPr>
+        <p:txBody>
+          <a:bodyPr anchor="ctr">
+            <a:normAutofit/>
+          </a:bodyPr>
+          <a:lstStyle/>
+          <a:p>
+            <a:pPr marL="0" indent="0" algn="ctr">
+              <a:buNone/>
+            </a:pPr>
+            <a:r>
+              <a:rPr lang="zh-TW" altLang="en-US" sz="6400" b="1" dirty="0">
+                <a:solidFill>
+                  <a:srgbClr val="660033"/>
+                </a:solidFill>
+                <a:latin typeface="Microsoft JhengHei" pitchFamily="34" charset="-120"/>
+                <a:ea typeface="Microsoft JhengHei" pitchFamily="34" charset="-120"/>
+              </a:rPr>
+              <a:t>千萬年我仍誦新詩</a:t>
+            </a:r>
+          </a:p>
+          <a:p>
+            <a:pPr marL="0" indent="0" algn="ctr">
+              <a:buNone/>
+            </a:pPr>
+            <a:r>
+              <a:rPr lang="zh-TW" altLang="en-US" sz="6400" b="1" dirty="0">
+                <a:solidFill>
+                  <a:srgbClr val="660033"/>
+                </a:solidFill>
+                <a:latin typeface="Microsoft JhengHei" pitchFamily="34" charset="-120"/>
+                <a:ea typeface="Microsoft JhengHei" pitchFamily="34" charset="-120"/>
+              </a:rPr>
+              <a:t>耶穌凡事引導我</a:t>
+            </a:r>
+          </a:p>
+        </p:txBody>
+      </p:sp>
+      <p:sp>
+        <p:nvSpPr>
+          <p:cNvPr id="3" name="TextBox 2">
+            <a:extLst>
+              <a:ext uri="{FF2B5EF4-FFF2-40B4-BE49-F238E27FC236}">
+                <a16:creationId xmlns:a16="http://schemas.microsoft.com/office/drawing/2014/main" id="{24FE8EB8-AEF8-2E09-87EC-5DD3E77738CB}"/>
+              </a:ext>
+            </a:extLst>
+          </p:cNvPr>
+          <p:cNvSpPr txBox="1"/>
+          <p:nvPr/>
+        </p:nvSpPr>
+        <p:spPr>
+          <a:xfrm>
+            <a:off x="0" y="5061182"/>
+            <a:ext cx="12192000" cy="707886"/>
+          </a:xfrm>
+          <a:prstGeom prst="rect">
+            <a:avLst/>
+          </a:prstGeom>
+          <a:noFill/>
+        </p:spPr>
+        <p:txBody>
+          <a:bodyPr wrap="square" rtlCol="0">
+            <a:spAutoFit/>
+          </a:bodyPr>
+          <a:lstStyle/>
+          <a:p>
+            <a:pPr algn="ctr"/>
+            <a:r>
+              <a:rPr lang="en-US" sz="4000" b="1" dirty="0">
+                <a:solidFill>
+                  <a:srgbClr val="660033"/>
+                </a:solidFill>
+              </a:rPr>
+              <a:t>( 3 / 3 )(</a:t>
+            </a:r>
+            <a:r>
+              <a:rPr lang="zh-CN" altLang="en-US" sz="4000" b="1" dirty="0">
+                <a:solidFill>
+                  <a:srgbClr val="660033"/>
+                </a:solidFill>
+              </a:rPr>
+              <a:t>２次</a:t>
+            </a:r>
+            <a:r>
+              <a:rPr lang="en-US" altLang="zh-CN" sz="4000" b="1" dirty="0">
+                <a:solidFill>
+                  <a:srgbClr val="660033"/>
+                </a:solidFill>
+              </a:rPr>
+              <a:t>)</a:t>
+            </a:r>
+            <a:endParaRPr lang="vi-VN" sz="4000" b="1" dirty="0">
+              <a:solidFill>
+                <a:srgbClr val="660033"/>
+              </a:solidFill>
+            </a:endParaRPr>
+          </a:p>
+        </p:txBody>
+      </p:sp>
+    </p:spTree>
+    <p:extLst>
+      <p:ext uri="{BB962C8B-B14F-4D97-AF65-F5344CB8AC3E}">
+        <p14:creationId xmlns:p14="http://schemas.microsoft.com/office/powerpoint/2010/main" val="2620821215"/>
+      </p:ext>
+    </p:extLst>
   </p:cSld>
   <p:clrMapOvr>
     <a:masterClrMapping/>
@@ -3548,114 +3854,102 @@
       </p:grpSpPr>
       <p:sp>
         <p:nvSpPr>
-          <p:cNvPr id="4" name="標題 3"/>
-          <p:cNvSpPr>
-            <a:spLocks noGrp="1"/>
-          </p:cNvSpPr>
-          <p:nvPr>
-            <p:ph type="title"/>
+          <p:cNvPr id="5" name="內容版面配置區 4"/>
+          <p:cNvSpPr>
+            <a:spLocks noGrp="1"/>
+          </p:cNvSpPr>
+          <p:nvPr>
+            <p:ph idx="1"/>
           </p:nvPr>
         </p:nvSpPr>
         <p:spPr>
           <a:xfrm>
-            <a:off x="0" y="0"/>
-            <a:ext cx="8229600" cy="1143000"/>
+            <a:off x="0" y="2084851"/>
+            <a:ext cx="12192000" cy="2404863"/>
           </a:xfrm>
         </p:spPr>
         <p:txBody>
-          <a:bodyPr/>
-          <a:lstStyle/>
-          <a:p>
-            <a:r>
-              <a:rPr lang="zh-TW" altLang="en-US" dirty="0"/>
-              <a:t>救主引導</a:t>
-            </a:r>
-          </a:p>
-        </p:txBody>
-      </p:sp>
-      <p:sp>
-        <p:nvSpPr>
-          <p:cNvPr id="5" name="內容版面配置區 4"/>
-          <p:cNvSpPr>
-            <a:spLocks noGrp="1"/>
-          </p:cNvSpPr>
-          <p:nvPr>
-            <p:ph idx="1"/>
-          </p:nvPr>
+          <a:bodyPr anchor="ctr">
+            <a:normAutofit/>
+          </a:bodyPr>
+          <a:lstStyle/>
+          <a:p>
+            <a:pPr marL="0" indent="0" algn="ctr">
+              <a:buNone/>
+            </a:pPr>
+            <a:r>
+              <a:rPr lang="zh-TW" altLang="en-US" sz="6400" b="1" dirty="0">
+                <a:solidFill>
+                  <a:srgbClr val="660033"/>
+                </a:solidFill>
+                <a:latin typeface="Microsoft JhengHei" pitchFamily="34" charset="-120"/>
+                <a:ea typeface="Microsoft JhengHei" pitchFamily="34" charset="-120"/>
+              </a:rPr>
+              <a:t>救世主凡事引導我</a:t>
+            </a:r>
+          </a:p>
+          <a:p>
+            <a:pPr marL="0" indent="0" algn="ctr">
+              <a:buNone/>
+            </a:pPr>
+            <a:r>
+              <a:rPr lang="zh-TW" altLang="en-US" sz="6400" b="1" dirty="0">
+                <a:solidFill>
+                  <a:srgbClr val="660033"/>
+                </a:solidFill>
+                <a:latin typeface="Microsoft JhengHei" pitchFamily="34" charset="-120"/>
+                <a:ea typeface="Microsoft JhengHei" pitchFamily="34" charset="-120"/>
+              </a:rPr>
+              <a:t>我何需別有所求</a:t>
+            </a:r>
+          </a:p>
+        </p:txBody>
+      </p:sp>
+      <p:sp>
+        <p:nvSpPr>
+          <p:cNvPr id="3" name="TextBox 2"/>
+          <p:cNvSpPr txBox="1"/>
+          <p:nvPr/>
         </p:nvSpPr>
         <p:spPr>
           <a:xfrm>
-            <a:off x="0" y="928670"/>
-            <a:ext cx="9144000" cy="5929330"/>
+            <a:off x="0" y="5061182"/>
+            <a:ext cx="12192000" cy="707886"/>
           </a:xfrm>
+          <a:prstGeom prst="rect">
+            <a:avLst/>
+          </a:prstGeom>
+          <a:noFill/>
         </p:spPr>
         <p:txBody>
-          <a:bodyPr>
-            <a:normAutofit/>
+          <a:bodyPr wrap="square" rtlCol="0">
+            <a:spAutoFit/>
           </a:bodyPr>
           <a:lstStyle/>
           <a:p>
-            <a:pPr algn="ctr">
-              <a:buNone/>
-            </a:pPr>
-            <a:r>
-              <a:rPr lang="zh-TW" altLang="en-US" sz="5400" dirty="0"/>
-              <a:t>慈悲主賜天上安慰</a:t>
-            </a:r>
-          </a:p>
-          <a:p>
-            <a:pPr algn="ctr">
-              <a:buNone/>
-            </a:pPr>
-            <a:r>
-              <a:rPr lang="zh-TW" altLang="en-US" sz="5400" dirty="0"/>
-              <a:t>今因信可同主住</a:t>
-            </a:r>
-          </a:p>
-          <a:p>
-            <a:pPr algn="ctr">
-              <a:buNone/>
-            </a:pPr>
-            <a:r>
-              <a:rPr lang="zh-TW" altLang="en-US" sz="5400" dirty="0"/>
-              <a:t>我深知無論遇何事</a:t>
-            </a:r>
-          </a:p>
-          <a:p>
-            <a:pPr algn="ctr">
-              <a:buNone/>
-            </a:pPr>
-            <a:r>
-              <a:rPr lang="zh-TW" altLang="en-US" sz="5400" dirty="0"/>
-              <a:t>萬事主必善</a:t>
-            </a:r>
-            <a:r>
-              <a:rPr lang="zh-TW" altLang="en-US" sz="5400" dirty="0" smtClean="0"/>
-              <a:t>調處</a:t>
-            </a:r>
-          </a:p>
-          <a:p>
-            <a:pPr algn="ctr">
-              <a:buNone/>
-            </a:pPr>
-            <a:r>
-              <a:rPr lang="zh-TW" altLang="en-US" sz="5400" dirty="0" smtClean="0"/>
-              <a:t>我深知無論遇何事</a:t>
-            </a:r>
-          </a:p>
-          <a:p>
-            <a:pPr algn="ctr">
-              <a:buNone/>
-            </a:pPr>
-            <a:r>
-              <a:rPr lang="zh-TW" altLang="en-US" sz="5400" dirty="0" smtClean="0"/>
-              <a:t>萬事主必善調處</a:t>
-            </a:r>
-            <a:endParaRPr lang="zh-TW" altLang="en-US" sz="5400" dirty="0"/>
+            <a:pPr algn="ctr"/>
+            <a:r>
+              <a:rPr lang="en-US" sz="4000" b="1" dirty="0">
+                <a:solidFill>
+                  <a:srgbClr val="660033"/>
+                </a:solidFill>
+              </a:rPr>
+              <a:t>( 1 / 3 )</a:t>
+            </a:r>
+            <a:endParaRPr lang="vi-VN" sz="4000" b="1" dirty="0">
+              <a:solidFill>
+                <a:srgbClr val="660033"/>
+              </a:solidFill>
+            </a:endParaRPr>
           </a:p>
         </p:txBody>
       </p:sp>
     </p:spTree>
+    <p:extLst>
+      <p:ext uri="{BB962C8B-B14F-4D97-AF65-F5344CB8AC3E}">
+        <p14:creationId xmlns:p14="http://schemas.microsoft.com/office/powerpoint/2010/main" val="1407003638"/>
+      </p:ext>
+    </p:extLst>
   </p:cSld>
   <p:clrMapOvr>
     <a:masterClrMapping/>
@@ -3668,7 +3962,13 @@
   <p:cSld>
     <p:spTree>
       <p:nvGrpSpPr>
-        <p:cNvPr id="1" name=""/>
+        <p:cNvPr id="1" name="">
+          <a:extLst>
+            <a:ext uri="{FF2B5EF4-FFF2-40B4-BE49-F238E27FC236}">
+              <a16:creationId xmlns:a16="http://schemas.microsoft.com/office/drawing/2014/main" id="{DD07EB31-E4A3-C9CF-5268-298625E36620}"/>
+            </a:ext>
+          </a:extLst>
+        </p:cNvPr>
         <p:cNvGrpSpPr/>
         <p:nvPr/>
       </p:nvGrpSpPr>
@@ -3682,92 +3982,114 @@
       </p:grpSpPr>
       <p:sp>
         <p:nvSpPr>
-          <p:cNvPr id="4" name="標題 3"/>
-          <p:cNvSpPr>
-            <a:spLocks noGrp="1"/>
-          </p:cNvSpPr>
-          <p:nvPr>
-            <p:ph type="title"/>
+          <p:cNvPr id="5" name="內容版面配置區 4">
+            <a:extLst>
+              <a:ext uri="{FF2B5EF4-FFF2-40B4-BE49-F238E27FC236}">
+                <a16:creationId xmlns:a16="http://schemas.microsoft.com/office/drawing/2014/main" id="{C9FFD304-7C40-43CD-77CD-9DD378DFBDA7}"/>
+              </a:ext>
+            </a:extLst>
+          </p:cNvPr>
+          <p:cNvSpPr>
+            <a:spLocks noGrp="1"/>
+          </p:cNvSpPr>
+          <p:nvPr>
+            <p:ph idx="1"/>
           </p:nvPr>
         </p:nvSpPr>
         <p:spPr>
           <a:xfrm>
-            <a:off x="0" y="0"/>
-            <a:ext cx="8229600" cy="1143000"/>
+            <a:off x="0" y="2084851"/>
+            <a:ext cx="12192000" cy="2404863"/>
           </a:xfrm>
         </p:spPr>
         <p:txBody>
-          <a:bodyPr/>
-          <a:lstStyle/>
-          <a:p>
-            <a:r>
-              <a:rPr lang="zh-TW" altLang="en-US" dirty="0"/>
-              <a:t>救主引導</a:t>
-            </a:r>
-          </a:p>
-        </p:txBody>
-      </p:sp>
-      <p:sp>
-        <p:nvSpPr>
-          <p:cNvPr id="5" name="內容版面配置區 4"/>
-          <p:cNvSpPr>
-            <a:spLocks noGrp="1"/>
-          </p:cNvSpPr>
-          <p:nvPr>
-            <p:ph idx="1"/>
-          </p:nvPr>
+          <a:bodyPr anchor="ctr">
+            <a:normAutofit/>
+          </a:bodyPr>
+          <a:lstStyle/>
+          <a:p>
+            <a:pPr marL="0" indent="0" algn="ctr">
+              <a:buNone/>
+            </a:pPr>
+            <a:r>
+              <a:rPr lang="zh-TW" altLang="en-US" sz="6400" b="1" dirty="0">
+                <a:solidFill>
+                  <a:srgbClr val="660033"/>
+                </a:solidFill>
+                <a:latin typeface="Microsoft JhengHei" pitchFamily="34" charset="-120"/>
+                <a:ea typeface="Microsoft JhengHei" pitchFamily="34" charset="-120"/>
+              </a:rPr>
+              <a:t>就主恩我何用心多</a:t>
+            </a:r>
+          </a:p>
+          <a:p>
+            <a:pPr marL="0" indent="0" algn="ctr">
+              <a:buNone/>
+            </a:pPr>
+            <a:r>
+              <a:rPr lang="zh-TW" altLang="en-US" sz="6400" b="1" dirty="0">
+                <a:solidFill>
+                  <a:srgbClr val="660033"/>
+                </a:solidFill>
+                <a:latin typeface="Microsoft JhengHei" pitchFamily="34" charset="-120"/>
+                <a:ea typeface="Microsoft JhengHei" pitchFamily="34" charset="-120"/>
+              </a:rPr>
+              <a:t>奇妙恩一生拯救</a:t>
+            </a:r>
+          </a:p>
+        </p:txBody>
+      </p:sp>
+      <p:sp>
+        <p:nvSpPr>
+          <p:cNvPr id="3" name="TextBox 2">
+            <a:extLst>
+              <a:ext uri="{FF2B5EF4-FFF2-40B4-BE49-F238E27FC236}">
+                <a16:creationId xmlns:a16="http://schemas.microsoft.com/office/drawing/2014/main" id="{1EF31F83-E208-59FB-9E7C-30B81C99ED25}"/>
+              </a:ext>
+            </a:extLst>
+          </p:cNvPr>
+          <p:cNvSpPr txBox="1"/>
+          <p:nvPr/>
         </p:nvSpPr>
         <p:spPr>
           <a:xfrm>
-            <a:off x="0" y="928670"/>
-            <a:ext cx="9144000" cy="5929330"/>
+            <a:off x="0" y="5061182"/>
+            <a:ext cx="12192000" cy="707886"/>
           </a:xfrm>
+          <a:prstGeom prst="rect">
+            <a:avLst/>
+          </a:prstGeom>
+          <a:noFill/>
         </p:spPr>
         <p:txBody>
-          <a:bodyPr>
-            <a:normAutofit/>
+          <a:bodyPr wrap="square" rtlCol="0">
+            <a:spAutoFit/>
           </a:bodyPr>
           <a:lstStyle/>
           <a:p>
-            <a:pPr lvl="0" algn="ctr">
-              <a:buNone/>
-            </a:pPr>
-            <a:r>
-              <a:rPr lang="zh-TW" altLang="en-US" sz="5400" dirty="0" smtClean="0"/>
-              <a:t>救世主凡事引導我</a:t>
-            </a:r>
-          </a:p>
-          <a:p>
-            <a:pPr algn="ctr">
-              <a:buNone/>
-            </a:pPr>
-            <a:r>
-              <a:rPr lang="zh-TW" altLang="en-US" sz="5400" dirty="0" smtClean="0"/>
-              <a:t>崎嶇路安心同去</a:t>
-            </a:r>
-          </a:p>
-          <a:p>
-            <a:pPr algn="ctr">
-              <a:buNone/>
-            </a:pPr>
-            <a:r>
-              <a:rPr lang="zh-TW" altLang="en-US" sz="5400" dirty="0" smtClean="0"/>
-              <a:t>患難時主施恩相助</a:t>
-            </a:r>
-          </a:p>
-          <a:p>
-            <a:pPr algn="ctr">
-              <a:buNone/>
-            </a:pPr>
-            <a:r>
-              <a:rPr lang="zh-TW" altLang="en-US" sz="5400" dirty="0" smtClean="0"/>
-              <a:t>賜活餅供我靈需</a:t>
-            </a:r>
-            <a:endParaRPr lang="zh-TW" altLang="en-US" sz="5400" dirty="0"/>
+            <a:pPr algn="ctr"/>
+            <a:r>
+              <a:rPr lang="en-US" sz="4000" b="1" dirty="0">
+                <a:solidFill>
+                  <a:srgbClr val="660033"/>
+                </a:solidFill>
+              </a:rPr>
+              <a:t>( 1 / 3 )</a:t>
+            </a:r>
+            <a:endParaRPr lang="vi-VN" sz="4000" b="1" dirty="0">
+              <a:solidFill>
+                <a:srgbClr val="660033"/>
+              </a:solidFill>
+            </a:endParaRPr>
           </a:p>
         </p:txBody>
       </p:sp>
     </p:spTree>
+    <p:extLst>
+      <p:ext uri="{BB962C8B-B14F-4D97-AF65-F5344CB8AC3E}">
+        <p14:creationId xmlns:p14="http://schemas.microsoft.com/office/powerpoint/2010/main" val="3654710719"/>
+      </p:ext>
+    </p:extLst>
   </p:cSld>
   <p:clrMapOvr>
     <a:masterClrMapping/>
@@ -3780,7 +4102,13 @@
   <p:cSld>
     <p:spTree>
       <p:nvGrpSpPr>
-        <p:cNvPr id="1" name=""/>
+        <p:cNvPr id="1" name="">
+          <a:extLst>
+            <a:ext uri="{FF2B5EF4-FFF2-40B4-BE49-F238E27FC236}">
+              <a16:creationId xmlns:a16="http://schemas.microsoft.com/office/drawing/2014/main" id="{95927686-73D8-416C-15D9-65D51686E28D}"/>
+            </a:ext>
+          </a:extLst>
+        </p:cNvPr>
         <p:cNvGrpSpPr/>
         <p:nvPr/>
       </p:nvGrpSpPr>
@@ -3794,110 +4122,114 @@
       </p:grpSpPr>
       <p:sp>
         <p:nvSpPr>
-          <p:cNvPr id="4" name="標題 3"/>
-          <p:cNvSpPr>
-            <a:spLocks noGrp="1"/>
-          </p:cNvSpPr>
-          <p:nvPr>
-            <p:ph type="title"/>
+          <p:cNvPr id="5" name="內容版面配置區 4">
+            <a:extLst>
+              <a:ext uri="{FF2B5EF4-FFF2-40B4-BE49-F238E27FC236}">
+                <a16:creationId xmlns:a16="http://schemas.microsoft.com/office/drawing/2014/main" id="{92FCFDB6-F216-EC6E-FDCC-A896D8E8E2EE}"/>
+              </a:ext>
+            </a:extLst>
+          </p:cNvPr>
+          <p:cNvSpPr>
+            <a:spLocks noGrp="1"/>
+          </p:cNvSpPr>
+          <p:nvPr>
+            <p:ph idx="1"/>
           </p:nvPr>
         </p:nvSpPr>
         <p:spPr>
           <a:xfrm>
-            <a:off x="0" y="0"/>
-            <a:ext cx="8229600" cy="1143000"/>
+            <a:off x="0" y="2084851"/>
+            <a:ext cx="12192000" cy="2404863"/>
           </a:xfrm>
         </p:spPr>
         <p:txBody>
-          <a:bodyPr/>
-          <a:lstStyle/>
-          <a:p>
-            <a:r>
-              <a:rPr lang="zh-TW" altLang="en-US" dirty="0"/>
-              <a:t>救主引導</a:t>
-            </a:r>
-          </a:p>
-        </p:txBody>
-      </p:sp>
-      <p:sp>
-        <p:nvSpPr>
-          <p:cNvPr id="5" name="內容版面配置區 4"/>
-          <p:cNvSpPr>
-            <a:spLocks noGrp="1"/>
-          </p:cNvSpPr>
-          <p:nvPr>
-            <p:ph idx="1"/>
-          </p:nvPr>
+          <a:bodyPr anchor="ctr">
+            <a:normAutofit/>
+          </a:bodyPr>
+          <a:lstStyle/>
+          <a:p>
+            <a:pPr marL="0" indent="0" algn="ctr">
+              <a:buNone/>
+            </a:pPr>
+            <a:r>
+              <a:rPr lang="zh-TW" altLang="en-US" sz="6400" b="1" dirty="0">
+                <a:solidFill>
+                  <a:srgbClr val="660033"/>
+                </a:solidFill>
+                <a:latin typeface="Microsoft JhengHei" pitchFamily="34" charset="-120"/>
+                <a:ea typeface="Microsoft JhengHei" pitchFamily="34" charset="-120"/>
+              </a:rPr>
+              <a:t>慈悲主賜天上安慰</a:t>
+            </a:r>
+          </a:p>
+          <a:p>
+            <a:pPr marL="0" indent="0" algn="ctr">
+              <a:buNone/>
+            </a:pPr>
+            <a:r>
+              <a:rPr lang="zh-TW" altLang="en-US" sz="6400" b="1" dirty="0">
+                <a:solidFill>
+                  <a:srgbClr val="660033"/>
+                </a:solidFill>
+                <a:latin typeface="Microsoft JhengHei" pitchFamily="34" charset="-120"/>
+                <a:ea typeface="Microsoft JhengHei" pitchFamily="34" charset="-120"/>
+              </a:rPr>
+              <a:t>今因信可同主住</a:t>
+            </a:r>
+          </a:p>
+        </p:txBody>
+      </p:sp>
+      <p:sp>
+        <p:nvSpPr>
+          <p:cNvPr id="3" name="TextBox 2">
+            <a:extLst>
+              <a:ext uri="{FF2B5EF4-FFF2-40B4-BE49-F238E27FC236}">
+                <a16:creationId xmlns:a16="http://schemas.microsoft.com/office/drawing/2014/main" id="{1E11CD34-6D1E-695A-90B4-A30C07426577}"/>
+              </a:ext>
+            </a:extLst>
+          </p:cNvPr>
+          <p:cNvSpPr txBox="1"/>
+          <p:nvPr/>
         </p:nvSpPr>
         <p:spPr>
           <a:xfrm>
-            <a:off x="0" y="928670"/>
-            <a:ext cx="9144000" cy="5929330"/>
+            <a:off x="0" y="5061182"/>
+            <a:ext cx="12192000" cy="707886"/>
           </a:xfrm>
+          <a:prstGeom prst="rect">
+            <a:avLst/>
+          </a:prstGeom>
+          <a:noFill/>
         </p:spPr>
         <p:txBody>
-          <a:bodyPr>
-            <a:normAutofit/>
+          <a:bodyPr wrap="square" rtlCol="0">
+            <a:spAutoFit/>
           </a:bodyPr>
           <a:lstStyle/>
           <a:p>
-            <a:pPr algn="ctr">
-              <a:buNone/>
-            </a:pPr>
-            <a:r>
-              <a:rPr lang="zh-TW" altLang="en-US" sz="5400" dirty="0" smtClean="0"/>
-              <a:t>困倦時步履雖無力</a:t>
-            </a:r>
-          </a:p>
-          <a:p>
-            <a:pPr algn="ctr">
-              <a:buNone/>
-            </a:pPr>
-            <a:r>
-              <a:rPr lang="zh-TW" altLang="en-US" sz="5400" dirty="0" smtClean="0"/>
-              <a:t>我靈魂飢渴難當</a:t>
-            </a:r>
-          </a:p>
-          <a:p>
-            <a:pPr algn="ctr">
-              <a:buNone/>
-            </a:pPr>
-            <a:r>
-              <a:rPr lang="zh-TW" altLang="en-US" sz="5400" dirty="0" smtClean="0"/>
-              <a:t>主靈磐活泉流不息</a:t>
-            </a:r>
-          </a:p>
-          <a:p>
-            <a:pPr algn="ctr">
-              <a:buNone/>
-            </a:pPr>
-            <a:r>
-              <a:rPr lang="zh-TW" altLang="en-US" sz="5400" dirty="0" smtClean="0"/>
-              <a:t>快樂足解我憂傷</a:t>
-            </a:r>
-          </a:p>
-          <a:p>
-            <a:pPr algn="ctr">
-              <a:buNone/>
-            </a:pPr>
-            <a:r>
-              <a:rPr lang="zh-TW" altLang="en-US" sz="5400" dirty="0" smtClean="0"/>
-              <a:t>主靈磐活泉流不息</a:t>
-            </a:r>
-          </a:p>
-          <a:p>
-            <a:pPr algn="ctr">
-              <a:buNone/>
-            </a:pPr>
-            <a:r>
-              <a:rPr lang="zh-TW" altLang="en-US" sz="5400" dirty="0" smtClean="0"/>
-              <a:t>快樂足解我憂傷</a:t>
-            </a:r>
-            <a:endParaRPr lang="zh-TW" altLang="en-US" sz="5400" dirty="0"/>
+            <a:pPr algn="ctr"/>
+            <a:r>
+              <a:rPr lang="en-US" sz="4000" b="1" dirty="0">
+                <a:solidFill>
+                  <a:srgbClr val="660033"/>
+                </a:solidFill>
+              </a:rPr>
+              <a:t>( 1 / 3 )</a:t>
+            </a:r>
+            <a:endParaRPr lang="vi-VN" sz="4000" b="1" dirty="0">
+              <a:solidFill>
+                <a:srgbClr val="660033"/>
+              </a:solidFill>
+            </a:endParaRPr>
           </a:p>
         </p:txBody>
       </p:sp>
     </p:spTree>
+    <p:extLst>
+      <p:ext uri="{BB962C8B-B14F-4D97-AF65-F5344CB8AC3E}">
+        <p14:creationId xmlns:p14="http://schemas.microsoft.com/office/powerpoint/2010/main" val="1319475936"/>
+      </p:ext>
+    </p:extLst>
   </p:cSld>
   <p:clrMapOvr>
     <a:masterClrMapping/>
@@ -3910,7 +4242,13 @@
   <p:cSld>
     <p:spTree>
       <p:nvGrpSpPr>
-        <p:cNvPr id="1" name=""/>
+        <p:cNvPr id="1" name="">
+          <a:extLst>
+            <a:ext uri="{FF2B5EF4-FFF2-40B4-BE49-F238E27FC236}">
+              <a16:creationId xmlns:a16="http://schemas.microsoft.com/office/drawing/2014/main" id="{AD1655C7-3035-4C9B-C70C-8AC04F375E19}"/>
+            </a:ext>
+          </a:extLst>
+        </p:cNvPr>
         <p:cNvGrpSpPr/>
         <p:nvPr/>
       </p:nvGrpSpPr>
@@ -3924,92 +4262,130 @@
       </p:grpSpPr>
       <p:sp>
         <p:nvSpPr>
-          <p:cNvPr id="4" name="標題 3"/>
-          <p:cNvSpPr>
-            <a:spLocks noGrp="1"/>
-          </p:cNvSpPr>
-          <p:nvPr>
-            <p:ph type="title"/>
+          <p:cNvPr id="5" name="內容版面配置區 4">
+            <a:extLst>
+              <a:ext uri="{FF2B5EF4-FFF2-40B4-BE49-F238E27FC236}">
+                <a16:creationId xmlns:a16="http://schemas.microsoft.com/office/drawing/2014/main" id="{2EF106F1-90C1-E593-E398-A332B9515B07}"/>
+              </a:ext>
+            </a:extLst>
+          </p:cNvPr>
+          <p:cNvSpPr>
+            <a:spLocks noGrp="1"/>
+          </p:cNvSpPr>
+          <p:nvPr>
+            <p:ph idx="1"/>
           </p:nvPr>
         </p:nvSpPr>
         <p:spPr>
           <a:xfrm>
-            <a:off x="0" y="0"/>
-            <a:ext cx="8229600" cy="1143000"/>
+            <a:off x="0" y="2084851"/>
+            <a:ext cx="12192000" cy="2404863"/>
           </a:xfrm>
         </p:spPr>
         <p:txBody>
-          <a:bodyPr/>
-          <a:lstStyle/>
-          <a:p>
-            <a:r>
-              <a:rPr lang="zh-TW" altLang="en-US" dirty="0"/>
-              <a:t>救主引導</a:t>
-            </a:r>
-          </a:p>
-        </p:txBody>
-      </p:sp>
-      <p:sp>
-        <p:nvSpPr>
-          <p:cNvPr id="5" name="內容版面配置區 4"/>
-          <p:cNvSpPr>
-            <a:spLocks noGrp="1"/>
-          </p:cNvSpPr>
-          <p:nvPr>
-            <p:ph idx="1"/>
-          </p:nvPr>
+          <a:bodyPr anchor="ctr">
+            <a:normAutofit/>
+          </a:bodyPr>
+          <a:lstStyle/>
+          <a:p>
+            <a:pPr marL="0" indent="0" algn="ctr">
+              <a:buNone/>
+            </a:pPr>
+            <a:r>
+              <a:rPr lang="zh-TW" altLang="en-US" sz="6400" b="1" dirty="0">
+                <a:solidFill>
+                  <a:srgbClr val="660033"/>
+                </a:solidFill>
+                <a:latin typeface="Microsoft JhengHei" pitchFamily="34" charset="-120"/>
+                <a:ea typeface="Microsoft JhengHei" pitchFamily="34" charset="-120"/>
+              </a:rPr>
+              <a:t>我深知無論遇何事</a:t>
+            </a:r>
+          </a:p>
+          <a:p>
+            <a:pPr marL="0" indent="0" algn="ctr">
+              <a:buNone/>
+            </a:pPr>
+            <a:r>
+              <a:rPr lang="zh-TW" altLang="en-US" sz="6400" b="1" dirty="0">
+                <a:solidFill>
+                  <a:srgbClr val="660033"/>
+                </a:solidFill>
+                <a:latin typeface="Microsoft JhengHei" pitchFamily="34" charset="-120"/>
+                <a:ea typeface="Microsoft JhengHei" pitchFamily="34" charset="-120"/>
+              </a:rPr>
+              <a:t>萬事主必善調處</a:t>
+            </a:r>
+          </a:p>
+        </p:txBody>
+      </p:sp>
+      <p:sp>
+        <p:nvSpPr>
+          <p:cNvPr id="3" name="TextBox 2">
+            <a:extLst>
+              <a:ext uri="{FF2B5EF4-FFF2-40B4-BE49-F238E27FC236}">
+                <a16:creationId xmlns:a16="http://schemas.microsoft.com/office/drawing/2014/main" id="{F50714D0-11F3-88AF-E5BB-CD17833530E7}"/>
+              </a:ext>
+            </a:extLst>
+          </p:cNvPr>
+          <p:cNvSpPr txBox="1"/>
+          <p:nvPr/>
         </p:nvSpPr>
         <p:spPr>
           <a:xfrm>
-            <a:off x="0" y="928670"/>
-            <a:ext cx="9144000" cy="5929330"/>
+            <a:off x="0" y="5061182"/>
+            <a:ext cx="12192000" cy="707886"/>
           </a:xfrm>
+          <a:prstGeom prst="rect">
+            <a:avLst/>
+          </a:prstGeom>
+          <a:noFill/>
         </p:spPr>
         <p:txBody>
-          <a:bodyPr>
-            <a:normAutofit/>
+          <a:bodyPr wrap="square" rtlCol="0">
+            <a:spAutoFit/>
           </a:bodyPr>
           <a:lstStyle/>
           <a:p>
-            <a:pPr lvl="0" algn="ctr">
-              <a:buNone/>
-            </a:pPr>
-            <a:r>
-              <a:rPr lang="zh-TW" altLang="en-US" sz="5400" dirty="0" smtClean="0"/>
-              <a:t>救世主凡事引導我</a:t>
-            </a:r>
-          </a:p>
-          <a:p>
-            <a:pPr algn="ctr">
-              <a:buNone/>
-            </a:pPr>
-            <a:r>
-              <a:rPr lang="zh-TW" altLang="en-US" sz="5400" dirty="0" smtClean="0"/>
-              <a:t>主向我何等慈愛</a:t>
-            </a:r>
-          </a:p>
-          <a:p>
-            <a:pPr algn="ctr">
-              <a:buNone/>
-            </a:pPr>
-            <a:r>
-              <a:rPr lang="zh-TW" altLang="en-US" sz="5400" dirty="0" smtClean="0"/>
-              <a:t>所應許俱是安樂多</a:t>
-            </a:r>
-          </a:p>
-          <a:p>
-            <a:pPr algn="ctr">
-              <a:buNone/>
-            </a:pPr>
-            <a:r>
-              <a:rPr lang="zh-TW" altLang="en-US" sz="5400" dirty="0" smtClean="0"/>
-              <a:t>在天堂我父家內</a:t>
-            </a:r>
-            <a:endParaRPr lang="zh-TW" altLang="en-US" sz="5400" dirty="0"/>
+            <a:pPr algn="ctr"/>
+            <a:r>
+              <a:rPr lang="en-US" sz="4000" b="1" dirty="0">
+                <a:solidFill>
+                  <a:srgbClr val="660033"/>
+                </a:solidFill>
+              </a:rPr>
+              <a:t>( 1 / 3 )(</a:t>
+            </a:r>
+            <a:r>
+              <a:rPr lang="zh-CN" altLang="en-US" sz="4000" b="1" dirty="0">
+                <a:solidFill>
+                  <a:srgbClr val="660033"/>
+                </a:solidFill>
+              </a:rPr>
+              <a:t>２次</a:t>
+            </a:r>
+            <a:r>
+              <a:rPr lang="en-US" altLang="zh-CN" sz="4000" b="1" dirty="0">
+                <a:solidFill>
+                  <a:srgbClr val="660033"/>
+                </a:solidFill>
+              </a:rPr>
+              <a:t>)</a:t>
+            </a:r>
+            <a:endParaRPr lang="vi-VN" sz="4000" b="1" dirty="0">
+              <a:solidFill>
+                <a:srgbClr val="660033"/>
+              </a:solidFill>
+            </a:endParaRPr>
           </a:p>
         </p:txBody>
       </p:sp>
     </p:spTree>
+    <p:extLst>
+      <p:ext uri="{BB962C8B-B14F-4D97-AF65-F5344CB8AC3E}">
+        <p14:creationId xmlns:p14="http://schemas.microsoft.com/office/powerpoint/2010/main" val="2926225633"/>
+      </p:ext>
+    </p:extLst>
   </p:cSld>
   <p:clrMapOvr>
     <a:masterClrMapping/>
@@ -4022,7 +4398,13 @@
   <p:cSld>
     <p:spTree>
       <p:nvGrpSpPr>
-        <p:cNvPr id="1" name=""/>
+        <p:cNvPr id="1" name="">
+          <a:extLst>
+            <a:ext uri="{FF2B5EF4-FFF2-40B4-BE49-F238E27FC236}">
+              <a16:creationId xmlns:a16="http://schemas.microsoft.com/office/drawing/2014/main" id="{B51349AD-FCB6-E8E4-6858-93C352D5749B}"/>
+            </a:ext>
+          </a:extLst>
+        </p:cNvPr>
         <p:cNvGrpSpPr/>
         <p:nvPr/>
       </p:nvGrpSpPr>
@@ -4036,166 +4418,550 @@
       </p:grpSpPr>
       <p:sp>
         <p:nvSpPr>
-          <p:cNvPr id="4" name="標題 3"/>
-          <p:cNvSpPr>
-            <a:spLocks noGrp="1"/>
-          </p:cNvSpPr>
-          <p:nvPr>
-            <p:ph type="title"/>
+          <p:cNvPr id="5" name="內容版面配置區 4">
+            <a:extLst>
+              <a:ext uri="{FF2B5EF4-FFF2-40B4-BE49-F238E27FC236}">
+                <a16:creationId xmlns:a16="http://schemas.microsoft.com/office/drawing/2014/main" id="{98230288-ACB4-5693-3C4D-4C7847C8ED97}"/>
+              </a:ext>
+            </a:extLst>
+          </p:cNvPr>
+          <p:cNvSpPr>
+            <a:spLocks noGrp="1"/>
+          </p:cNvSpPr>
+          <p:nvPr>
+            <p:ph idx="1"/>
           </p:nvPr>
         </p:nvSpPr>
         <p:spPr>
           <a:xfrm>
-            <a:off x="0" y="0"/>
-            <a:ext cx="8229600" cy="1143000"/>
+            <a:off x="0" y="2084851"/>
+            <a:ext cx="12192000" cy="2404863"/>
           </a:xfrm>
         </p:spPr>
         <p:txBody>
-          <a:bodyPr/>
-          <a:lstStyle/>
-          <a:p>
-            <a:r>
-              <a:rPr lang="zh-TW" altLang="en-US" dirty="0"/>
-              <a:t>救主引導</a:t>
-            </a:r>
-          </a:p>
-        </p:txBody>
-      </p:sp>
-      <p:sp>
-        <p:nvSpPr>
-          <p:cNvPr id="5" name="內容版面配置區 4"/>
-          <p:cNvSpPr>
-            <a:spLocks noGrp="1"/>
-          </p:cNvSpPr>
-          <p:nvPr>
-            <p:ph idx="1"/>
-          </p:nvPr>
+          <a:bodyPr anchor="ctr">
+            <a:normAutofit/>
+          </a:bodyPr>
+          <a:lstStyle/>
+          <a:p>
+            <a:pPr marL="0" indent="0" algn="ctr">
+              <a:buNone/>
+            </a:pPr>
+            <a:r>
+              <a:rPr lang="zh-TW" altLang="en-US" sz="6400" b="1" dirty="0">
+                <a:solidFill>
+                  <a:srgbClr val="660033"/>
+                </a:solidFill>
+                <a:latin typeface="Microsoft JhengHei" pitchFamily="34" charset="-120"/>
+                <a:ea typeface="Microsoft JhengHei" pitchFamily="34" charset="-120"/>
+              </a:rPr>
+              <a:t>救世主凡事引導我</a:t>
+            </a:r>
+          </a:p>
+          <a:p>
+            <a:pPr marL="0" indent="0" algn="ctr">
+              <a:buNone/>
+            </a:pPr>
+            <a:r>
+              <a:rPr lang="zh-TW" altLang="en-US" sz="6400" b="1" dirty="0">
+                <a:solidFill>
+                  <a:srgbClr val="660033"/>
+                </a:solidFill>
+                <a:latin typeface="Microsoft JhengHei" pitchFamily="34" charset="-120"/>
+                <a:ea typeface="Microsoft JhengHei" pitchFamily="34" charset="-120"/>
+              </a:rPr>
+              <a:t>崎嶇路安心同去</a:t>
+            </a:r>
+          </a:p>
+        </p:txBody>
+      </p:sp>
+      <p:sp>
+        <p:nvSpPr>
+          <p:cNvPr id="3" name="TextBox 2">
+            <a:extLst>
+              <a:ext uri="{FF2B5EF4-FFF2-40B4-BE49-F238E27FC236}">
+                <a16:creationId xmlns:a16="http://schemas.microsoft.com/office/drawing/2014/main" id="{DB165FC5-15BF-D5C8-FB11-D4090B9380AD}"/>
+              </a:ext>
+            </a:extLst>
+          </p:cNvPr>
+          <p:cNvSpPr txBox="1"/>
+          <p:nvPr/>
         </p:nvSpPr>
         <p:spPr>
           <a:xfrm>
-            <a:off x="0" y="928670"/>
-            <a:ext cx="9144000" cy="5929330"/>
+            <a:off x="0" y="5061182"/>
+            <a:ext cx="12192000" cy="707886"/>
+          </a:xfrm>
+          <a:prstGeom prst="rect">
+            <a:avLst/>
+          </a:prstGeom>
+          <a:noFill/>
+        </p:spPr>
+        <p:txBody>
+          <a:bodyPr wrap="square" rtlCol="0">
+            <a:spAutoFit/>
+          </a:bodyPr>
+          <a:lstStyle/>
+          <a:p>
+            <a:pPr algn="ctr"/>
+            <a:r>
+              <a:rPr lang="en-US" sz="4000" b="1" dirty="0">
+                <a:solidFill>
+                  <a:srgbClr val="660033"/>
+                </a:solidFill>
+              </a:rPr>
+              <a:t>( 2 / 3 )</a:t>
+            </a:r>
+            <a:endParaRPr lang="vi-VN" sz="4000" b="1" dirty="0">
+              <a:solidFill>
+                <a:srgbClr val="660033"/>
+              </a:solidFill>
+            </a:endParaRPr>
+          </a:p>
+        </p:txBody>
+      </p:sp>
+    </p:spTree>
+    <p:extLst>
+      <p:ext uri="{BB962C8B-B14F-4D97-AF65-F5344CB8AC3E}">
+        <p14:creationId xmlns:p14="http://schemas.microsoft.com/office/powerpoint/2010/main" val="1026427309"/>
+      </p:ext>
+    </p:extLst>
+  </p:cSld>
+  <p:clrMapOvr>
+    <a:masterClrMapping/>
+  </p:clrMapOvr>
+</p:sld>
+</file>
+
+<file path=ppt/slides/slide7.xml><?xml version="1.0" encoding="utf-8"?>
+<p:sld xmlns:a="http://schemas.openxmlformats.org/drawingml/2006/main" xmlns:r="http://schemas.openxmlformats.org/officeDocument/2006/relationships" xmlns:p="http://schemas.openxmlformats.org/presentationml/2006/main">
+  <p:cSld>
+    <p:spTree>
+      <p:nvGrpSpPr>
+        <p:cNvPr id="1" name="">
+          <a:extLst>
+            <a:ext uri="{FF2B5EF4-FFF2-40B4-BE49-F238E27FC236}">
+              <a16:creationId xmlns:a16="http://schemas.microsoft.com/office/drawing/2014/main" id="{FE6EE800-0383-5F82-6E67-D9C9FDBF5DB5}"/>
+            </a:ext>
+          </a:extLst>
+        </p:cNvPr>
+        <p:cNvGrpSpPr/>
+        <p:nvPr/>
+      </p:nvGrpSpPr>
+      <p:grpSpPr>
+        <a:xfrm>
+          <a:off x="0" y="0"/>
+          <a:ext cx="0" cy="0"/>
+          <a:chOff x="0" y="0"/>
+          <a:chExt cx="0" cy="0"/>
+        </a:xfrm>
+      </p:grpSpPr>
+      <p:sp>
+        <p:nvSpPr>
+          <p:cNvPr id="5" name="內容版面配置區 4">
+            <a:extLst>
+              <a:ext uri="{FF2B5EF4-FFF2-40B4-BE49-F238E27FC236}">
+                <a16:creationId xmlns:a16="http://schemas.microsoft.com/office/drawing/2014/main" id="{4B837E49-1661-11AE-46F5-766C2E9287DC}"/>
+              </a:ext>
+            </a:extLst>
+          </p:cNvPr>
+          <p:cNvSpPr>
+            <a:spLocks noGrp="1"/>
+          </p:cNvSpPr>
+          <p:nvPr>
+            <p:ph idx="1"/>
+          </p:nvPr>
+        </p:nvSpPr>
+        <p:spPr>
+          <a:xfrm>
+            <a:off x="0" y="2084851"/>
+            <a:ext cx="12192000" cy="2404863"/>
           </a:xfrm>
         </p:spPr>
         <p:txBody>
-          <a:bodyPr>
+          <a:bodyPr anchor="ctr">
             <a:normAutofit/>
           </a:bodyPr>
           <a:lstStyle/>
           <a:p>
-            <a:pPr algn="ctr">
+            <a:pPr marL="0" indent="0" algn="ctr">
               <a:buNone/>
             </a:pPr>
             <a:r>
-              <a:rPr lang="zh-TW" altLang="en-US" sz="5400" dirty="0" smtClean="0">
-                <a:latin typeface="新細明體" pitchFamily="18" charset="-120"/>
-                <a:ea typeface="新細明體" pitchFamily="18" charset="-120"/>
+              <a:rPr lang="zh-TW" altLang="en-US" sz="6400" b="1" dirty="0">
+                <a:solidFill>
+                  <a:srgbClr val="660033"/>
+                </a:solidFill>
+                <a:latin typeface="Microsoft JhengHei" pitchFamily="34" charset="-120"/>
+                <a:ea typeface="Microsoft JhengHei" pitchFamily="34" charset="-120"/>
               </a:rPr>
-              <a:t>我靈魂得進永生時</a:t>
-            </a:r>
-          </a:p>
-          <a:p>
-            <a:pPr algn="ctr">
+              <a:t>患難時主施恩相助</a:t>
+            </a:r>
+          </a:p>
+          <a:p>
+            <a:pPr marL="0" indent="0" algn="ctr">
               <a:buNone/>
             </a:pPr>
             <a:r>
-              <a:rPr lang="zh-TW" altLang="en-US" sz="5400" dirty="0" smtClean="0">
-                <a:latin typeface="新細明體" pitchFamily="18" charset="-120"/>
-                <a:ea typeface="新細明體" pitchFamily="18" charset="-120"/>
+              <a:rPr lang="zh-TW" altLang="en-US" sz="6400" b="1" dirty="0">
+                <a:solidFill>
+                  <a:srgbClr val="660033"/>
+                </a:solidFill>
+                <a:latin typeface="Microsoft JhengHei" pitchFamily="34" charset="-120"/>
+                <a:ea typeface="Microsoft JhengHei" pitchFamily="34" charset="-120"/>
               </a:rPr>
-              <a:t>如雙翼飛進神座</a:t>
-            </a:r>
-          </a:p>
-          <a:p>
-            <a:pPr algn="ctr">
+              <a:t>賜活餅供我靈需</a:t>
+            </a:r>
+          </a:p>
+        </p:txBody>
+      </p:sp>
+      <p:sp>
+        <p:nvSpPr>
+          <p:cNvPr id="3" name="TextBox 2">
+            <a:extLst>
+              <a:ext uri="{FF2B5EF4-FFF2-40B4-BE49-F238E27FC236}">
+                <a16:creationId xmlns:a16="http://schemas.microsoft.com/office/drawing/2014/main" id="{F7B10B36-81D6-35C4-92E0-DED0836582DF}"/>
+              </a:ext>
+            </a:extLst>
+          </p:cNvPr>
+          <p:cNvSpPr txBox="1"/>
+          <p:nvPr/>
+        </p:nvSpPr>
+        <p:spPr>
+          <a:xfrm>
+            <a:off x="0" y="5061182"/>
+            <a:ext cx="12192000" cy="707886"/>
+          </a:xfrm>
+          <a:prstGeom prst="rect">
+            <a:avLst/>
+          </a:prstGeom>
+          <a:noFill/>
+        </p:spPr>
+        <p:txBody>
+          <a:bodyPr wrap="square" rtlCol="0">
+            <a:spAutoFit/>
+          </a:bodyPr>
+          <a:lstStyle/>
+          <a:p>
+            <a:pPr algn="ctr"/>
+            <a:r>
+              <a:rPr lang="en-US" sz="4000" b="1" dirty="0">
+                <a:solidFill>
+                  <a:srgbClr val="660033"/>
+                </a:solidFill>
+              </a:rPr>
+              <a:t>( 2 / 3 )</a:t>
+            </a:r>
+            <a:endParaRPr lang="vi-VN" sz="4000" b="1" dirty="0">
+              <a:solidFill>
+                <a:srgbClr val="660033"/>
+              </a:solidFill>
+            </a:endParaRPr>
+          </a:p>
+        </p:txBody>
+      </p:sp>
+    </p:spTree>
+    <p:extLst>
+      <p:ext uri="{BB962C8B-B14F-4D97-AF65-F5344CB8AC3E}">
+        <p14:creationId xmlns:p14="http://schemas.microsoft.com/office/powerpoint/2010/main" val="615392471"/>
+      </p:ext>
+    </p:extLst>
+  </p:cSld>
+  <p:clrMapOvr>
+    <a:masterClrMapping/>
+  </p:clrMapOvr>
+</p:sld>
+</file>
+
+<file path=ppt/slides/slide8.xml><?xml version="1.0" encoding="utf-8"?>
+<p:sld xmlns:a="http://schemas.openxmlformats.org/drawingml/2006/main" xmlns:r="http://schemas.openxmlformats.org/officeDocument/2006/relationships" xmlns:p="http://schemas.openxmlformats.org/presentationml/2006/main">
+  <p:cSld>
+    <p:spTree>
+      <p:nvGrpSpPr>
+        <p:cNvPr id="1" name="">
+          <a:extLst>
+            <a:ext uri="{FF2B5EF4-FFF2-40B4-BE49-F238E27FC236}">
+              <a16:creationId xmlns:a16="http://schemas.microsoft.com/office/drawing/2014/main" id="{8507F24B-65AA-E3B9-022F-81C9B344EF2B}"/>
+            </a:ext>
+          </a:extLst>
+        </p:cNvPr>
+        <p:cNvGrpSpPr/>
+        <p:nvPr/>
+      </p:nvGrpSpPr>
+      <p:grpSpPr>
+        <a:xfrm>
+          <a:off x="0" y="0"/>
+          <a:ext cx="0" cy="0"/>
+          <a:chOff x="0" y="0"/>
+          <a:chExt cx="0" cy="0"/>
+        </a:xfrm>
+      </p:grpSpPr>
+      <p:sp>
+        <p:nvSpPr>
+          <p:cNvPr id="5" name="內容版面配置區 4">
+            <a:extLst>
+              <a:ext uri="{FF2B5EF4-FFF2-40B4-BE49-F238E27FC236}">
+                <a16:creationId xmlns:a16="http://schemas.microsoft.com/office/drawing/2014/main" id="{B4BB9367-A32E-60CF-63F5-CF95AABC8884}"/>
+              </a:ext>
+            </a:extLst>
+          </p:cNvPr>
+          <p:cNvSpPr>
+            <a:spLocks noGrp="1"/>
+          </p:cNvSpPr>
+          <p:nvPr>
+            <p:ph idx="1"/>
+          </p:nvPr>
+        </p:nvSpPr>
+        <p:spPr>
+          <a:xfrm>
+            <a:off x="0" y="2084851"/>
+            <a:ext cx="12192000" cy="2404863"/>
+          </a:xfrm>
+        </p:spPr>
+        <p:txBody>
+          <a:bodyPr anchor="ctr">
+            <a:normAutofit/>
+          </a:bodyPr>
+          <a:lstStyle/>
+          <a:p>
+            <a:pPr marL="0" indent="0" algn="ctr">
               <a:buNone/>
             </a:pPr>
             <a:r>
-              <a:rPr lang="zh-TW" altLang="en-US" sz="5400" dirty="0" smtClean="0">
-                <a:latin typeface="新細明體" pitchFamily="18" charset="-120"/>
-                <a:ea typeface="新細明體" pitchFamily="18" charset="-120"/>
+              <a:rPr lang="zh-TW" altLang="en-US" sz="6400" b="1" dirty="0">
+                <a:solidFill>
+                  <a:srgbClr val="660033"/>
+                </a:solidFill>
+                <a:latin typeface="Microsoft JhengHei" pitchFamily="34" charset="-120"/>
+                <a:ea typeface="Microsoft JhengHei" pitchFamily="34" charset="-120"/>
               </a:rPr>
-              <a:t>千萬年我仍頌新詩</a:t>
-            </a:r>
-          </a:p>
-          <a:p>
-            <a:pPr algn="ctr">
+              <a:t>困倦時步履雖無力</a:t>
+            </a:r>
+          </a:p>
+          <a:p>
+            <a:pPr marL="0" indent="0" algn="ctr">
               <a:buNone/>
             </a:pPr>
             <a:r>
-              <a:rPr lang="zh-TW" altLang="en-US" sz="5400" dirty="0" smtClean="0">
-                <a:latin typeface="新細明體" pitchFamily="18" charset="-120"/>
-                <a:ea typeface="新細明體" pitchFamily="18" charset="-120"/>
+              <a:rPr lang="zh-TW" altLang="en-US" sz="6400" b="1" dirty="0">
+                <a:solidFill>
+                  <a:srgbClr val="660033"/>
+                </a:solidFill>
+                <a:latin typeface="Microsoft JhengHei" pitchFamily="34" charset="-120"/>
+                <a:ea typeface="Microsoft JhengHei" pitchFamily="34" charset="-120"/>
               </a:rPr>
-              <a:t>耶穌凡事</a:t>
-            </a:r>
-            <a:r>
-              <a:rPr lang="zh-TW" altLang="en-US" sz="5400" dirty="0" smtClean="0">
-                <a:latin typeface="新細明體" pitchFamily="18" charset="-120"/>
-                <a:ea typeface="新細明體" pitchFamily="18" charset="-120"/>
+              <a:t>我靈魂飢渴難當</a:t>
+            </a:r>
+          </a:p>
+        </p:txBody>
+      </p:sp>
+      <p:sp>
+        <p:nvSpPr>
+          <p:cNvPr id="3" name="TextBox 2">
+            <a:extLst>
+              <a:ext uri="{FF2B5EF4-FFF2-40B4-BE49-F238E27FC236}">
+                <a16:creationId xmlns:a16="http://schemas.microsoft.com/office/drawing/2014/main" id="{82A1660D-A954-0F25-C973-C1F82024E041}"/>
+              </a:ext>
+            </a:extLst>
+          </p:cNvPr>
+          <p:cNvSpPr txBox="1"/>
+          <p:nvPr/>
+        </p:nvSpPr>
+        <p:spPr>
+          <a:xfrm>
+            <a:off x="0" y="5061182"/>
+            <a:ext cx="12192000" cy="707886"/>
+          </a:xfrm>
+          <a:prstGeom prst="rect">
+            <a:avLst/>
+          </a:prstGeom>
+          <a:noFill/>
+        </p:spPr>
+        <p:txBody>
+          <a:bodyPr wrap="square" rtlCol="0">
+            <a:spAutoFit/>
+          </a:bodyPr>
+          <a:lstStyle/>
+          <a:p>
+            <a:pPr algn="ctr"/>
+            <a:r>
+              <a:rPr lang="en-US" sz="4000" b="1" dirty="0">
+                <a:solidFill>
+                  <a:srgbClr val="660033"/>
+                </a:solidFill>
               </a:rPr>
-              <a:t>引</a:t>
-            </a:r>
-            <a:r>
-              <a:rPr lang="zh-CN" altLang="en-US" sz="5400" dirty="0" smtClean="0">
-                <a:latin typeface="新細明體" pitchFamily="18" charset="-120"/>
-                <a:ea typeface="新細明體" pitchFamily="18" charset="-120"/>
+              <a:t>( 2 / 3 )</a:t>
+            </a:r>
+            <a:endParaRPr lang="vi-VN" sz="4000" b="1" dirty="0">
+              <a:solidFill>
+                <a:srgbClr val="660033"/>
+              </a:solidFill>
+            </a:endParaRPr>
+          </a:p>
+        </p:txBody>
+      </p:sp>
+    </p:spTree>
+    <p:extLst>
+      <p:ext uri="{BB962C8B-B14F-4D97-AF65-F5344CB8AC3E}">
+        <p14:creationId xmlns:p14="http://schemas.microsoft.com/office/powerpoint/2010/main" val="268017519"/>
+      </p:ext>
+    </p:extLst>
+  </p:cSld>
+  <p:clrMapOvr>
+    <a:masterClrMapping/>
+  </p:clrMapOvr>
+</p:sld>
+</file>
+
+<file path=ppt/slides/slide9.xml><?xml version="1.0" encoding="utf-8"?>
+<p:sld xmlns:a="http://schemas.openxmlformats.org/drawingml/2006/main" xmlns:r="http://schemas.openxmlformats.org/officeDocument/2006/relationships" xmlns:p="http://schemas.openxmlformats.org/presentationml/2006/main">
+  <p:cSld>
+    <p:spTree>
+      <p:nvGrpSpPr>
+        <p:cNvPr id="1" name="">
+          <a:extLst>
+            <a:ext uri="{FF2B5EF4-FFF2-40B4-BE49-F238E27FC236}">
+              <a16:creationId xmlns:a16="http://schemas.microsoft.com/office/drawing/2014/main" id="{4A58B72B-1D43-795D-0B0D-2B733CD3FB4F}"/>
+            </a:ext>
+          </a:extLst>
+        </p:cNvPr>
+        <p:cNvGrpSpPr/>
+        <p:nvPr/>
+      </p:nvGrpSpPr>
+      <p:grpSpPr>
+        <a:xfrm>
+          <a:off x="0" y="0"/>
+          <a:ext cx="0" cy="0"/>
+          <a:chOff x="0" y="0"/>
+          <a:chExt cx="0" cy="0"/>
+        </a:xfrm>
+      </p:grpSpPr>
+      <p:sp>
+        <p:nvSpPr>
+          <p:cNvPr id="5" name="內容版面配置區 4">
+            <a:extLst>
+              <a:ext uri="{FF2B5EF4-FFF2-40B4-BE49-F238E27FC236}">
+                <a16:creationId xmlns:a16="http://schemas.microsoft.com/office/drawing/2014/main" id="{BA77852C-51F4-33B0-7CDB-BE3AA52BB00D}"/>
+              </a:ext>
+            </a:extLst>
+          </p:cNvPr>
+          <p:cNvSpPr>
+            <a:spLocks noGrp="1"/>
+          </p:cNvSpPr>
+          <p:nvPr>
+            <p:ph idx="1"/>
+          </p:nvPr>
+        </p:nvSpPr>
+        <p:spPr>
+          <a:xfrm>
+            <a:off x="0" y="2084851"/>
+            <a:ext cx="12192000" cy="2404863"/>
+          </a:xfrm>
+        </p:spPr>
+        <p:txBody>
+          <a:bodyPr anchor="ctr">
+            <a:normAutofit/>
+          </a:bodyPr>
+          <a:lstStyle/>
+          <a:p>
+            <a:pPr marL="0" indent="0" algn="ctr">
+              <a:buNone/>
+            </a:pPr>
+            <a:r>
+              <a:rPr lang="zh-TW" altLang="en-US" sz="6400" b="1" dirty="0">
+                <a:solidFill>
+                  <a:srgbClr val="660033"/>
+                </a:solidFill>
+                <a:latin typeface="Microsoft JhengHei" pitchFamily="34" charset="-120"/>
+                <a:ea typeface="Microsoft JhengHei" pitchFamily="34" charset="-120"/>
               </a:rPr>
-              <a:t>導</a:t>
-            </a:r>
-            <a:r>
-              <a:rPr lang="zh-TW" altLang="en-US" sz="5400" dirty="0" smtClean="0">
-                <a:latin typeface="新細明體" pitchFamily="18" charset="-120"/>
-                <a:ea typeface="新細明體" pitchFamily="18" charset="-120"/>
+              <a:t>主靈磐活泉流不息</a:t>
+            </a:r>
+          </a:p>
+          <a:p>
+            <a:pPr marL="0" indent="0" algn="ctr">
+              <a:buNone/>
+            </a:pPr>
+            <a:r>
+              <a:rPr lang="zh-TW" altLang="en-US" sz="6400" b="1" dirty="0">
+                <a:solidFill>
+                  <a:srgbClr val="660033"/>
+                </a:solidFill>
+                <a:latin typeface="Microsoft JhengHei" pitchFamily="34" charset="-120"/>
+                <a:ea typeface="Microsoft JhengHei" pitchFamily="34" charset="-120"/>
               </a:rPr>
-              <a:t>我</a:t>
-            </a:r>
-            <a:endParaRPr lang="zh-TW" altLang="en-US" sz="5400" dirty="0" smtClean="0">
-              <a:latin typeface="新細明體" pitchFamily="18" charset="-120"/>
-              <a:ea typeface="新細明體" pitchFamily="18" charset="-120"/>
+              <a:t>快樂足解我憂傷</a:t>
+            </a:r>
+          </a:p>
+        </p:txBody>
+      </p:sp>
+      <p:sp>
+        <p:nvSpPr>
+          <p:cNvPr id="3" name="TextBox 2">
+            <a:extLst>
+              <a:ext uri="{FF2B5EF4-FFF2-40B4-BE49-F238E27FC236}">
+                <a16:creationId xmlns:a16="http://schemas.microsoft.com/office/drawing/2014/main" id="{FFB34456-30B1-56AB-FE89-03284E99BF59}"/>
+              </a:ext>
+            </a:extLst>
+          </p:cNvPr>
+          <p:cNvSpPr txBox="1"/>
+          <p:nvPr/>
+        </p:nvSpPr>
+        <p:spPr>
+          <a:xfrm>
+            <a:off x="0" y="5061182"/>
+            <a:ext cx="12192000" cy="707886"/>
+          </a:xfrm>
+          <a:prstGeom prst="rect">
+            <a:avLst/>
+          </a:prstGeom>
+          <a:noFill/>
+        </p:spPr>
+        <p:txBody>
+          <a:bodyPr wrap="square" rtlCol="0">
+            <a:spAutoFit/>
+          </a:bodyPr>
+          <a:lstStyle/>
+          <a:p>
+            <a:pPr algn="ctr"/>
+            <a:r>
+              <a:rPr lang="en-US" sz="4000" b="1" dirty="0">
+                <a:solidFill>
+                  <a:srgbClr val="660033"/>
+                </a:solidFill>
+              </a:rPr>
+              <a:t>( 2 / 3 )(</a:t>
+            </a:r>
+            <a:r>
+              <a:rPr lang="zh-CN" altLang="en-US" sz="4000" b="1" dirty="0">
+                <a:solidFill>
+                  <a:srgbClr val="660033"/>
+                </a:solidFill>
+              </a:rPr>
+              <a:t>２次</a:t>
+            </a:r>
+            <a:r>
+              <a:rPr lang="en-US" altLang="zh-CN" sz="4000" b="1" dirty="0">
+                <a:solidFill>
+                  <a:srgbClr val="660033"/>
+                </a:solidFill>
+              </a:rPr>
+              <a:t>)</a:t>
+            </a:r>
+            <a:endParaRPr lang="vi-VN" sz="4000" b="1" dirty="0">
+              <a:solidFill>
+                <a:srgbClr val="660033"/>
+              </a:solidFill>
             </a:endParaRPr>
           </a:p>
-          <a:p>
-            <a:pPr algn="ctr">
-              <a:buNone/>
-            </a:pPr>
-            <a:r>
-              <a:rPr lang="zh-TW" altLang="en-US" sz="5400" dirty="0" smtClean="0">
-                <a:latin typeface="新細明體" pitchFamily="18" charset="-120"/>
-                <a:ea typeface="新細明體" pitchFamily="18" charset="-120"/>
-              </a:rPr>
-              <a:t>千萬年我仍頌新詩</a:t>
-            </a:r>
-          </a:p>
-          <a:p>
-            <a:pPr algn="ctr">
-              <a:buNone/>
-            </a:pPr>
-            <a:r>
-              <a:rPr lang="zh-TW" altLang="en-US" sz="5400" dirty="0" smtClean="0">
-                <a:latin typeface="新細明體" pitchFamily="18" charset="-120"/>
-                <a:ea typeface="新細明體" pitchFamily="18" charset="-120"/>
-              </a:rPr>
-              <a:t>耶穌凡事引</a:t>
-            </a:r>
-            <a:r>
-              <a:rPr lang="zh-CN" altLang="en-US" sz="5400" dirty="0" smtClean="0">
-                <a:latin typeface="新細明體" pitchFamily="18" charset="-120"/>
-                <a:ea typeface="新細明體" pitchFamily="18" charset="-120"/>
-              </a:rPr>
-              <a:t>導</a:t>
-            </a:r>
-            <a:r>
-              <a:rPr lang="zh-TW" altLang="en-US" sz="5400" dirty="0" smtClean="0">
-                <a:latin typeface="新細明體" pitchFamily="18" charset="-120"/>
-                <a:ea typeface="新細明體" pitchFamily="18" charset="-120"/>
-              </a:rPr>
-              <a:t>我</a:t>
-            </a:r>
-          </a:p>
         </p:txBody>
       </p:sp>
     </p:spTree>
+    <p:extLst>
+      <p:ext uri="{BB962C8B-B14F-4D97-AF65-F5344CB8AC3E}">
+        <p14:creationId xmlns:p14="http://schemas.microsoft.com/office/powerpoint/2010/main" val="2960758833"/>
+      </p:ext>
+    </p:extLst>
   </p:cSld>
   <p:clrMapOvr>
     <a:masterClrMapping/>
@@ -4204,62 +4970,62 @@
 </file>
 
 <file path=ppt/theme/theme1.xml><?xml version="1.0" encoding="utf-8"?>
-<a:theme xmlns:a="http://schemas.openxmlformats.org/drawingml/2006/main" name="佈景主題16">
+<a:theme xmlns:a="http://schemas.openxmlformats.org/drawingml/2006/main" name="Theme1">
   <a:themeElements>
-    <a:clrScheme name="Slik-1">
+    <a:clrScheme name="Office">
       <a:dk1>
-        <a:srgbClr val="000000"/>
+        <a:sysClr val="windowText" lastClr="000000"/>
       </a:dk1>
       <a:lt1>
-        <a:srgbClr val="FFFFFF"/>
+        <a:sysClr val="window" lastClr="FFFFFF"/>
       </a:lt1>
       <a:dk2>
-        <a:srgbClr val="043988"/>
+        <a:srgbClr val="1F497D"/>
       </a:dk2>
       <a:lt2>
-        <a:srgbClr val="92C2EB"/>
+        <a:srgbClr val="EEECE1"/>
       </a:lt2>
       <a:accent1>
-        <a:srgbClr val="836AAE"/>
+        <a:srgbClr val="4F81BD"/>
       </a:accent1>
       <a:accent2>
-        <a:srgbClr val="5DA577"/>
+        <a:srgbClr val="C0504D"/>
       </a:accent2>
       <a:accent3>
-        <a:srgbClr val="678EB9"/>
+        <a:srgbClr val="9BBB59"/>
       </a:accent3>
       <a:accent4>
-        <a:srgbClr val="F7A611"/>
+        <a:srgbClr val="8064A2"/>
       </a:accent4>
       <a:accent5>
-        <a:srgbClr val="A1AB38"/>
+        <a:srgbClr val="4BACC6"/>
       </a:accent5>
       <a:accent6>
-        <a:srgbClr val="C17790"/>
+        <a:srgbClr val="F79646"/>
       </a:accent6>
       <a:hlink>
-        <a:srgbClr val="DA5723"/>
+        <a:srgbClr val="0000FF"/>
       </a:hlink>
       <a:folHlink>
-        <a:srgbClr val="226CA5"/>
+        <a:srgbClr val="800080"/>
       </a:folHlink>
     </a:clrScheme>
-    <a:fontScheme name="Slik-1">
+    <a:fontScheme name="Office">
       <a:majorFont>
-        <a:latin typeface="Arial"/>
+        <a:latin typeface="Calibri"/>
         <a:ea typeface=""/>
         <a:cs typeface=""/>
         <a:font script="Jpan" typeface="ＭＳ Ｐゴシック"/>
-        <a:font script="Hang" typeface="돋음"/>
-        <a:font script="Hans" typeface="方正姚体"/>
+        <a:font script="Hang" typeface="맑은 고딕"/>
+        <a:font script="Hans" typeface="宋体"/>
         <a:font script="Hant" typeface="新細明體"/>
-        <a:font script="Arab" typeface="Arial"/>
-        <a:font script="Hebr" typeface="Arial"/>
-        <a:font script="Thai" typeface="Cordia New"/>
+        <a:font script="Arab" typeface="Times New Roman"/>
+        <a:font script="Hebr" typeface="Times New Roman"/>
+        <a:font script="Thai" typeface="Angsana New"/>
         <a:font script="Ethi" typeface="Nyala"/>
         <a:font script="Beng" typeface="Vrinda"/>
         <a:font script="Gujr" typeface="Shruti"/>
-        <a:font script="Khmr" typeface="DaunPenh"/>
+        <a:font script="Khmr" typeface="MoolBoran"/>
         <a:font script="Knda" typeface="Tunga"/>
         <a:font script="Guru" typeface="Raavi"/>
         <a:font script="Cans" typeface="Euphemia"/>
@@ -4276,15 +5042,15 @@
         <a:font script="Laoo" typeface="DokChampa"/>
         <a:font script="Sinh" typeface="Iskoola Pota"/>
         <a:font script="Mong" typeface="Mongolian Baiti"/>
-        <a:font script="Viet" typeface="Arial"/>
+        <a:font script="Viet" typeface="Times New Roman"/>
         <a:font script="Uigh" typeface="Microsoft Uighur"/>
       </a:majorFont>
       <a:minorFont>
-        <a:latin typeface="Arial"/>
+        <a:latin typeface="Calibri"/>
         <a:ea typeface=""/>
         <a:cs typeface=""/>
         <a:font script="Jpan" typeface="ＭＳ Ｐゴシック"/>
-        <a:font script="Hang" typeface="돋음"/>
+        <a:font script="Hang" typeface="맑은 고딕"/>
         <a:font script="Hans" typeface="宋体"/>
         <a:font script="Hant" typeface="新細明體"/>
         <a:font script="Arab" typeface="Arial"/>
@@ -4314,7 +5080,7 @@
         <a:font script="Uigh" typeface="Microsoft Uighur"/>
       </a:minorFont>
     </a:fontScheme>
-    <a:fmtScheme name="Slik-1">
+    <a:fmtScheme name="Office">
       <a:fillStyleLst>
         <a:solidFill>
           <a:schemeClr val="phClr"/>
@@ -4323,71 +5089,56 @@
           <a:gsLst>
             <a:gs pos="0">
               <a:schemeClr val="phClr">
-                <a:tint val="20000"/>
-                <a:satMod val="250000"/>
+                <a:tint val="50000"/>
+                <a:satMod val="300000"/>
               </a:schemeClr>
             </a:gs>
-            <a:gs pos="30000">
+            <a:gs pos="35000">
               <a:schemeClr val="phClr">
-                <a:tint val="60000"/>
-                <a:satMod val="250000"/>
-              </a:schemeClr>
-            </a:gs>
-            <a:gs pos="50000">
-              <a:schemeClr val="phClr">
-                <a:tint val="57000"/>
-                <a:satMod val="250000"/>
+                <a:tint val="37000"/>
+                <a:satMod val="300000"/>
               </a:schemeClr>
             </a:gs>
             <a:gs pos="100000">
               <a:schemeClr val="phClr">
-                <a:tint val="28000"/>
-                <a:satMod val="250000"/>
+                <a:tint val="15000"/>
+                <a:satMod val="350000"/>
               </a:schemeClr>
             </a:gs>
           </a:gsLst>
-          <a:lin ang="6960000" scaled="1"/>
+          <a:lin ang="16200000" scaled="1"/>
         </a:gradFill>
         <a:gradFill rotWithShape="1">
           <a:gsLst>
             <a:gs pos="0">
               <a:schemeClr val="phClr">
-                <a:shade val="80000"/>
-                <a:satMod val="200000"/>
+                <a:shade val="51000"/>
+                <a:satMod val="130000"/>
               </a:schemeClr>
             </a:gs>
-            <a:gs pos="30000">
+            <a:gs pos="80000">
               <a:schemeClr val="phClr">
-                <a:shade val="20000"/>
-                <a:satMod val="250000"/>
-              </a:schemeClr>
-            </a:gs>
-            <a:gs pos="50000">
-              <a:schemeClr val="phClr">
-                <a:shade val="23000"/>
-                <a:satMod val="250000"/>
-              </a:schemeClr>
-            </a:gs>
-            <a:gs pos="60000">
-              <a:schemeClr val="phClr">
-                <a:shade val="29000"/>
-                <a:satMod val="230000"/>
+                <a:shade val="93000"/>
+                <a:satMod val="130000"/>
               </a:schemeClr>
             </a:gs>
             <a:gs pos="100000">
               <a:schemeClr val="phClr">
-                <a:shade val="70000"/>
-                <a:satMod val="200000"/>
+                <a:shade val="94000"/>
+                <a:satMod val="135000"/>
               </a:schemeClr>
             </a:gs>
           </a:gsLst>
-          <a:lin ang="6960000" scaled="1"/>
+          <a:lin ang="16200000" scaled="0"/>
         </a:gradFill>
       </a:fillStyleLst>
       <a:lnStyleLst>
-        <a:ln w="12700" cap="flat" cmpd="sng" algn="ctr">
+        <a:ln w="9525" cap="flat" cmpd="sng" algn="ctr">
           <a:solidFill>
-            <a:schemeClr val="phClr"/>
+            <a:schemeClr val="phClr">
+              <a:shade val="95000"/>
+              <a:satMod val="105000"/>
+            </a:schemeClr>
           </a:solidFill>
           <a:prstDash val="solid"/>
         </a:ln>
@@ -4397,7 +5148,7 @@
           </a:solidFill>
           <a:prstDash val="solid"/>
         </a:ln>
-        <a:ln w="31750" cap="flat" cmpd="sng" algn="ctr">
+        <a:ln w="38100" cap="flat" cmpd="sng" algn="ctr">
           <a:solidFill>
             <a:schemeClr val="phClr"/>
           </a:solidFill>
@@ -4407,7 +5158,16 @@
       <a:effectStyleLst>
         <a:effectStyle>
           <a:effectLst>
-            <a:outerShdw blurRad="63500" dist="50800" dir="5400000" algn="tl" rotWithShape="0">
+            <a:outerShdw blurRad="40000" dist="20000" dir="5400000" rotWithShape="0">
+              <a:srgbClr val="000000">
+                <a:alpha val="38000"/>
+              </a:srgbClr>
+            </a:outerShdw>
+          </a:effectLst>
+        </a:effectStyle>
+        <a:effectStyle>
+          <a:effectLst>
+            <a:outerShdw blurRad="40000" dist="23000" dir="5400000" rotWithShape="0">
               <a:srgbClr val="000000">
                 <a:alpha val="35000"/>
               </a:srgbClr>
@@ -4416,7 +5176,7 @@
         </a:effectStyle>
         <a:effectStyle>
           <a:effectLst>
-            <a:outerShdw blurRad="63500" dist="50800" dir="5400000" algn="tl" rotWithShape="0">
+            <a:outerShdw blurRad="40000" dist="23000" dir="5400000" rotWithShape="0">
               <a:srgbClr val="000000">
                 <a:alpha val="35000"/>
               </a:srgbClr>
@@ -4426,28 +5186,12 @@
             <a:camera prst="orthographicFront">
               <a:rot lat="0" lon="0" rev="0"/>
             </a:camera>
-            <a:lightRig rig="soft" dir="t"/>
+            <a:lightRig rig="threePt" dir="t">
+              <a:rot lat="0" lon="0" rev="1200000"/>
+            </a:lightRig>
           </a:scene3d>
           <a:sp3d>
-            <a:bevelT w="127000" h="12700"/>
-          </a:sp3d>
-        </a:effectStyle>
-        <a:effectStyle>
-          <a:effectLst>
-            <a:outerShdw blurRad="63500" dist="50800" dir="5400000" algn="tl" rotWithShape="0">
-              <a:srgbClr val="000000">
-                <a:alpha val="35000"/>
-              </a:srgbClr>
-            </a:outerShdw>
-          </a:effectLst>
-          <a:scene3d>
-            <a:camera prst="orthographicFront">
-              <a:rot lat="0" lon="0" rev="0"/>
-            </a:camera>
-            <a:lightRig rig="soft" dir="t"/>
-          </a:scene3d>
-          <a:sp3d>
-            <a:bevelT w="152400" h="25400"/>
+            <a:bevelT w="63500" h="25400"/>
           </a:sp3d>
         </a:effectStyle>
       </a:effectStyleLst>
@@ -4459,46 +5203,56 @@
           <a:gsLst>
             <a:gs pos="0">
               <a:schemeClr val="phClr">
-                <a:tint val="100000"/>
-                <a:shade val="50000"/>
-                <a:satMod val="150000"/>
+                <a:tint val="40000"/>
+                <a:satMod val="350000"/>
               </a:schemeClr>
             </a:gs>
-            <a:gs pos="50000">
+            <a:gs pos="40000">
               <a:schemeClr val="phClr">
-                <a:tint val="85000"/>
-                <a:shade val="100000"/>
-                <a:satMod val="140000"/>
+                <a:tint val="45000"/>
+                <a:shade val="99000"/>
+                <a:satMod val="350000"/>
               </a:schemeClr>
             </a:gs>
             <a:gs pos="100000">
               <a:schemeClr val="phClr">
-                <a:shade val="50000"/>
-                <a:satMod val="150000"/>
+                <a:shade val="20000"/>
+                <a:satMod val="255000"/>
               </a:schemeClr>
             </a:gs>
           </a:gsLst>
-          <a:lin ang="5400000" scaled="1"/>
+          <a:path path="circle">
+            <a:fillToRect l="50000" t="-80000" r="50000" b="180000"/>
+          </a:path>
         </a:gradFill>
-        <a:blipFill>
-          <a:blip xmlns:r="http://schemas.openxmlformats.org/officeDocument/2006/relationships" r:embed="rId1">
-            <a:duotone>
+        <a:gradFill rotWithShape="1">
+          <a:gsLst>
+            <a:gs pos="0">
               <a:schemeClr val="phClr">
-                <a:shade val="55000"/>
-                <a:satMod val="150000"/>
+                <a:tint val="80000"/>
+                <a:satMod val="300000"/>
               </a:schemeClr>
+            </a:gs>
+            <a:gs pos="100000">
               <a:schemeClr val="phClr">
-                <a:tint val="0"/>
-                <a:satMod val="150000"/>
+                <a:shade val="30000"/>
+                <a:satMod val="200000"/>
               </a:schemeClr>
-            </a:duotone>
-          </a:blip>
-          <a:stretch/>
-        </a:blipFill>
+            </a:gs>
+          </a:gsLst>
+          <a:path path="circle">
+            <a:fillToRect l="50000" t="50000" r="50000" b="50000"/>
+          </a:path>
+        </a:gradFill>
       </a:bgFillStyleLst>
     </a:fmtScheme>
   </a:themeElements>
   <a:objectDefaults/>
   <a:extraClrSchemeLst/>
+  <a:extLst>
+    <a:ext uri="{05A4C25C-085E-4340-85A3-A5531E510DB2}">
+      <thm15:themeFamily xmlns:thm15="http://schemas.microsoft.com/office/thememl/2012/main" name="Theme1" id="{384ED68F-161E-4EC5-AA47-8343C2AC128D}" vid="{FD3E678D-D6FA-4147-A139-1A6315ADEDC3}"/>
+    </a:ext>
+  </a:extLst>
 </a:theme>
 </file>